--- a/docs/phase1/dollar-doodle-presentation.pptx
+++ b/docs/phase1/dollar-doodle-presentation.pptx
@@ -9706,7 +9706,7 @@
   <dgm:whole/>
   <dgm:extLst>
     <a:ext uri="http://schemas.microsoft.com/office/drawing/2008/diagram">
-      <dsp:dataModelExt xmlns:dsp="http://schemas.microsoft.com/office/drawing/2008/diagram" relId="rId6" minVer="http://schemas.openxmlformats.org/drawingml/2006/diagram"/>
+      <dsp:dataModelExt xmlns:dsp="http://schemas.microsoft.com/office/drawing/2008/diagram" relId="rId7" minVer="http://schemas.openxmlformats.org/drawingml/2006/diagram"/>
     </a:ext>
   </dgm:extLst>
 </dgm:dataModel>
@@ -11502,7 +11502,7 @@
   <dgm:whole/>
   <dgm:extLst>
     <a:ext uri="http://schemas.microsoft.com/office/drawing/2008/diagram">
-      <dsp:dataModelExt xmlns:dsp="http://schemas.microsoft.com/office/drawing/2008/diagram" relId="rId6" minVer="http://schemas.openxmlformats.org/drawingml/2006/diagram"/>
+      <dsp:dataModelExt xmlns:dsp="http://schemas.microsoft.com/office/drawing/2008/diagram" relId="rId7" minVer="http://schemas.openxmlformats.org/drawingml/2006/diagram"/>
     </a:ext>
   </dgm:extLst>
 </dgm:dataModel>
@@ -12391,7 +12391,7 @@
   <dgm:whole/>
   <dgm:extLst>
     <a:ext uri="http://schemas.microsoft.com/office/drawing/2008/diagram">
-      <dsp:dataModelExt xmlns:dsp="http://schemas.microsoft.com/office/drawing/2008/diagram" relId="rId6" minVer="http://schemas.openxmlformats.org/drawingml/2006/diagram"/>
+      <dsp:dataModelExt xmlns:dsp="http://schemas.microsoft.com/office/drawing/2008/diagram" relId="rId7" minVer="http://schemas.openxmlformats.org/drawingml/2006/diagram"/>
     </a:ext>
   </dgm:extLst>
 </dgm:dataModel>
@@ -29851,7 +29851,7 @@
           <a:p>
             <a:fld id="{6F22469C-47B1-4613-8DB6-1F2FC0E34B63}" type="datetimeFigureOut">
               <a:rPr lang="en-US" smtClean="0"/>
-              <a:t>2/20/2026</a:t>
+              <a:t>2/22/2026</a:t>
             </a:fld>
             <a:endParaRPr lang="en-US"/>
           </a:p>
@@ -30210,6 +30210,267 @@
   <p:cSld>
     <p:spTree>
       <p:nvGrpSpPr>
+        <p:cNvPr id="1" name=""/>
+        <p:cNvGrpSpPr/>
+        <p:nvPr/>
+      </p:nvGrpSpPr>
+      <p:grpSpPr>
+        <a:xfrm>
+          <a:off x="0" y="0"/>
+          <a:ext cx="0" cy="0"/>
+          <a:chOff x="0" y="0"/>
+          <a:chExt cx="0" cy="0"/>
+        </a:xfrm>
+      </p:grpSpPr>
+      <p:sp>
+        <p:nvSpPr>
+          <p:cNvPr id="2" name="Slide Image Placeholder 1"/>
+          <p:cNvSpPr>
+            <a:spLocks noGrp="1" noRot="1" noChangeAspect="1"/>
+          </p:cNvSpPr>
+          <p:nvPr>
+            <p:ph type="sldImg"/>
+          </p:nvPr>
+        </p:nvSpPr>
+        <p:spPr/>
+      </p:sp>
+      <p:sp>
+        <p:nvSpPr>
+          <p:cNvPr id="3" name="Notes Placeholder 2"/>
+          <p:cNvSpPr>
+            <a:spLocks noGrp="1"/>
+          </p:cNvSpPr>
+          <p:nvPr>
+            <p:ph type="body" idx="1"/>
+          </p:nvPr>
+        </p:nvSpPr>
+        <p:spPr/>
+        <p:txBody>
+          <a:bodyPr/>
+          <a:lstStyle/>
+          <a:p>
+            <a:r>
+              <a:rPr lang="en-US" dirty="0"/>
+              <a:t>Nick</a:t>
+            </a:r>
+          </a:p>
+        </p:txBody>
+      </p:sp>
+      <p:sp>
+        <p:nvSpPr>
+          <p:cNvPr id="4" name="Slide Number Placeholder 3"/>
+          <p:cNvSpPr>
+            <a:spLocks noGrp="1"/>
+          </p:cNvSpPr>
+          <p:nvPr>
+            <p:ph type="sldNum" sz="quarter" idx="5"/>
+          </p:nvPr>
+        </p:nvSpPr>
+        <p:spPr/>
+        <p:txBody>
+          <a:bodyPr/>
+          <a:lstStyle/>
+          <a:p>
+            <a:fld id="{1B409B6C-98DA-45B7-B60D-BE2AEAD4CE1B}" type="slidenum">
+              <a:rPr lang="en-US" smtClean="0"/>
+              <a:t>10</a:t>
+            </a:fld>
+            <a:endParaRPr lang="en-US"/>
+          </a:p>
+        </p:txBody>
+      </p:sp>
+    </p:spTree>
+    <p:extLst>
+      <p:ext uri="{BB962C8B-B14F-4D97-AF65-F5344CB8AC3E}">
+        <p14:creationId xmlns:p14="http://schemas.microsoft.com/office/powerpoint/2010/main" val="671677208"/>
+      </p:ext>
+    </p:extLst>
+  </p:cSld>
+  <p:clrMapOvr>
+    <a:masterClrMapping/>
+  </p:clrMapOvr>
+</p:notes>
+</file>
+
+<file path=ppt/notesSlides/notesSlide11.xml><?xml version="1.0" encoding="utf-8"?>
+<p:notes xmlns:a="http://schemas.openxmlformats.org/drawingml/2006/main" xmlns:r="http://schemas.openxmlformats.org/officeDocument/2006/relationships" xmlns:p="http://schemas.openxmlformats.org/presentationml/2006/main">
+  <p:cSld>
+    <p:spTree>
+      <p:nvGrpSpPr>
+        <p:cNvPr id="1" name=""/>
+        <p:cNvGrpSpPr/>
+        <p:nvPr/>
+      </p:nvGrpSpPr>
+      <p:grpSpPr>
+        <a:xfrm>
+          <a:off x="0" y="0"/>
+          <a:ext cx="0" cy="0"/>
+          <a:chOff x="0" y="0"/>
+          <a:chExt cx="0" cy="0"/>
+        </a:xfrm>
+      </p:grpSpPr>
+      <p:sp>
+        <p:nvSpPr>
+          <p:cNvPr id="2" name="Slide Image Placeholder 1"/>
+          <p:cNvSpPr>
+            <a:spLocks noGrp="1" noRot="1" noChangeAspect="1"/>
+          </p:cNvSpPr>
+          <p:nvPr>
+            <p:ph type="sldImg"/>
+          </p:nvPr>
+        </p:nvSpPr>
+        <p:spPr/>
+      </p:sp>
+      <p:sp>
+        <p:nvSpPr>
+          <p:cNvPr id="3" name="Notes Placeholder 2"/>
+          <p:cNvSpPr>
+            <a:spLocks noGrp="1"/>
+          </p:cNvSpPr>
+          <p:nvPr>
+            <p:ph type="body" idx="1"/>
+          </p:nvPr>
+        </p:nvSpPr>
+        <p:spPr/>
+        <p:txBody>
+          <a:bodyPr/>
+          <a:lstStyle/>
+          <a:p>
+            <a:r>
+              <a:rPr lang="en-US" dirty="0"/>
+              <a:t>Nick</a:t>
+            </a:r>
+          </a:p>
+        </p:txBody>
+      </p:sp>
+      <p:sp>
+        <p:nvSpPr>
+          <p:cNvPr id="4" name="Slide Number Placeholder 3"/>
+          <p:cNvSpPr>
+            <a:spLocks noGrp="1"/>
+          </p:cNvSpPr>
+          <p:nvPr>
+            <p:ph type="sldNum" sz="quarter" idx="5"/>
+          </p:nvPr>
+        </p:nvSpPr>
+        <p:spPr/>
+        <p:txBody>
+          <a:bodyPr/>
+          <a:lstStyle/>
+          <a:p>
+            <a:fld id="{1B409B6C-98DA-45B7-B60D-BE2AEAD4CE1B}" type="slidenum">
+              <a:rPr lang="en-US" smtClean="0"/>
+              <a:t>11</a:t>
+            </a:fld>
+            <a:endParaRPr lang="en-US"/>
+          </a:p>
+        </p:txBody>
+      </p:sp>
+    </p:spTree>
+    <p:extLst>
+      <p:ext uri="{BB962C8B-B14F-4D97-AF65-F5344CB8AC3E}">
+        <p14:creationId xmlns:p14="http://schemas.microsoft.com/office/powerpoint/2010/main" val="108238797"/>
+      </p:ext>
+    </p:extLst>
+  </p:cSld>
+  <p:clrMapOvr>
+    <a:masterClrMapping/>
+  </p:clrMapOvr>
+</p:notes>
+</file>
+
+<file path=ppt/notesSlides/notesSlide12.xml><?xml version="1.0" encoding="utf-8"?>
+<p:notes xmlns:a="http://schemas.openxmlformats.org/drawingml/2006/main" xmlns:r="http://schemas.openxmlformats.org/officeDocument/2006/relationships" xmlns:p="http://schemas.openxmlformats.org/presentationml/2006/main">
+  <p:cSld>
+    <p:spTree>
+      <p:nvGrpSpPr>
+        <p:cNvPr id="1" name=""/>
+        <p:cNvGrpSpPr/>
+        <p:nvPr/>
+      </p:nvGrpSpPr>
+      <p:grpSpPr>
+        <a:xfrm>
+          <a:off x="0" y="0"/>
+          <a:ext cx="0" cy="0"/>
+          <a:chOff x="0" y="0"/>
+          <a:chExt cx="0" cy="0"/>
+        </a:xfrm>
+      </p:grpSpPr>
+      <p:sp>
+        <p:nvSpPr>
+          <p:cNvPr id="2" name="Slide Image Placeholder 1"/>
+          <p:cNvSpPr>
+            <a:spLocks noGrp="1" noRot="1" noChangeAspect="1"/>
+          </p:cNvSpPr>
+          <p:nvPr>
+            <p:ph type="sldImg"/>
+          </p:nvPr>
+        </p:nvSpPr>
+        <p:spPr/>
+      </p:sp>
+      <p:sp>
+        <p:nvSpPr>
+          <p:cNvPr id="3" name="Notes Placeholder 2"/>
+          <p:cNvSpPr>
+            <a:spLocks noGrp="1"/>
+          </p:cNvSpPr>
+          <p:nvPr>
+            <p:ph type="body" idx="1"/>
+          </p:nvPr>
+        </p:nvSpPr>
+        <p:spPr/>
+        <p:txBody>
+          <a:bodyPr/>
+          <a:lstStyle/>
+          <a:p>
+            <a:r>
+              <a:rPr lang="en-US" dirty="0"/>
+              <a:t>Alex</a:t>
+            </a:r>
+          </a:p>
+        </p:txBody>
+      </p:sp>
+      <p:sp>
+        <p:nvSpPr>
+          <p:cNvPr id="4" name="Slide Number Placeholder 3"/>
+          <p:cNvSpPr>
+            <a:spLocks noGrp="1"/>
+          </p:cNvSpPr>
+          <p:nvPr>
+            <p:ph type="sldNum" sz="quarter" idx="5"/>
+          </p:nvPr>
+        </p:nvSpPr>
+        <p:spPr/>
+        <p:txBody>
+          <a:bodyPr/>
+          <a:lstStyle/>
+          <a:p>
+            <a:fld id="{1B409B6C-98DA-45B7-B60D-BE2AEAD4CE1B}" type="slidenum">
+              <a:rPr lang="en-US" smtClean="0"/>
+              <a:t>12</a:t>
+            </a:fld>
+            <a:endParaRPr lang="en-US"/>
+          </a:p>
+        </p:txBody>
+      </p:sp>
+    </p:spTree>
+    <p:extLst>
+      <p:ext uri="{BB962C8B-B14F-4D97-AF65-F5344CB8AC3E}">
+        <p14:creationId xmlns:p14="http://schemas.microsoft.com/office/powerpoint/2010/main" val="3341856115"/>
+      </p:ext>
+    </p:extLst>
+  </p:cSld>
+  <p:clrMapOvr>
+    <a:masterClrMapping/>
+  </p:clrMapOvr>
+</p:notes>
+</file>
+
+<file path=ppt/notesSlides/notesSlide13.xml><?xml version="1.0" encoding="utf-8"?>
+<p:notes xmlns:a="http://schemas.openxmlformats.org/drawingml/2006/main" xmlns:r="http://schemas.openxmlformats.org/officeDocument/2006/relationships" xmlns:p="http://schemas.openxmlformats.org/presentationml/2006/main">
+  <p:cSld>
+    <p:spTree>
+      <p:nvGrpSpPr>
         <p:cNvPr id="1" name="">
           <a:extLst>
             <a:ext uri="{FF2B5EF4-FFF2-40B4-BE49-F238E27FC236}">
@@ -30269,7 +30530,7 @@
           <a:p>
             <a:r>
               <a:rPr lang="en-US" dirty="0"/>
-              <a:t>Will adjust this after meeting wed. </a:t>
+              <a:t>Alex</a:t>
             </a:r>
           </a:p>
         </p:txBody>
@@ -30362,7 +30623,7 @@
           <a:p>
             <a:r>
               <a:rPr lang="en-US" dirty="0"/>
-              <a:t>Adjusted to just have team member names on it. </a:t>
+              <a:t>Alex</a:t>
             </a:r>
           </a:p>
         </p:txBody>
@@ -30449,7 +30710,7 @@
           <a:p>
             <a:r>
               <a:rPr lang="en-US" dirty="0"/>
-              <a:t>This can be changed later when project idea decided. We will state all ideas we had here then state the one we chose.</a:t>
+              <a:t>Alex</a:t>
             </a:r>
           </a:p>
         </p:txBody>
@@ -30536,7 +30797,7 @@
           <a:p>
             <a:r>
               <a:rPr lang="en-US" dirty="0"/>
-              <a:t>This can be changed later when project idea decided. We will state all ideas we had here then state the one we chose.</a:t>
+              <a:t>Eva</a:t>
             </a:r>
           </a:p>
         </p:txBody>
@@ -30623,7 +30884,7 @@
           <a:p>
             <a:r>
               <a:rPr lang="en-US" dirty="0"/>
-              <a:t>Would like to change this to three different slides that say what will be on the front end, backend, and database(although the database part may not be needed)</a:t>
+              <a:t>Eva</a:t>
             </a:r>
           </a:p>
         </p:txBody>
@@ -30645,7 +30906,7 @@
           <a:p>
             <a:fld id="{1B409B6C-98DA-45B7-B60D-BE2AEAD4CE1B}" type="slidenum">
               <a:rPr lang="en-US" smtClean="0"/>
-              <a:t>6</a:t>
+              <a:t>5</a:t>
             </a:fld>
             <a:endParaRPr lang="en-US"/>
           </a:p>
@@ -30654,7 +30915,7 @@
     </p:spTree>
     <p:extLst>
       <p:ext uri="{BB962C8B-B14F-4D97-AF65-F5344CB8AC3E}">
-        <p14:creationId xmlns:p14="http://schemas.microsoft.com/office/powerpoint/2010/main" val="2362984022"/>
+        <p14:creationId xmlns:p14="http://schemas.microsoft.com/office/powerpoint/2010/main" val="2763047511"/>
       </p:ext>
     </p:extLst>
   </p:cSld>
@@ -30710,7 +30971,7 @@
           <a:p>
             <a:r>
               <a:rPr lang="en-US" dirty="0"/>
-              <a:t>Combine this with previous slide</a:t>
+              <a:t>Daniel</a:t>
             </a:r>
           </a:p>
         </p:txBody>
@@ -30732,7 +30993,7 @@
           <a:p>
             <a:fld id="{1B409B6C-98DA-45B7-B60D-BE2AEAD4CE1B}" type="slidenum">
               <a:rPr lang="en-US" smtClean="0"/>
-              <a:t>7</a:t>
+              <a:t>6</a:t>
             </a:fld>
             <a:endParaRPr lang="en-US"/>
           </a:p>
@@ -30741,7 +31002,7 @@
     </p:spTree>
     <p:extLst>
       <p:ext uri="{BB962C8B-B14F-4D97-AF65-F5344CB8AC3E}">
-        <p14:creationId xmlns:p14="http://schemas.microsoft.com/office/powerpoint/2010/main" val="4002144936"/>
+        <p14:creationId xmlns:p14="http://schemas.microsoft.com/office/powerpoint/2010/main" val="2362984022"/>
       </p:ext>
     </p:extLst>
   </p:cSld>
@@ -30797,7 +31058,7 @@
           <a:p>
             <a:r>
               <a:rPr lang="en-US" dirty="0"/>
-              <a:t>Combine with previous slide and instead make this the cutting edge technology we will use</a:t>
+              <a:t>Daniel</a:t>
             </a:r>
           </a:p>
         </p:txBody>
@@ -30819,7 +31080,7 @@
           <a:p>
             <a:fld id="{1B409B6C-98DA-45B7-B60D-BE2AEAD4CE1B}" type="slidenum">
               <a:rPr lang="en-US" smtClean="0"/>
-              <a:t>8</a:t>
+              <a:t>7</a:t>
             </a:fld>
             <a:endParaRPr lang="en-US"/>
           </a:p>
@@ -30828,7 +31089,7 @@
     </p:spTree>
     <p:extLst>
       <p:ext uri="{BB962C8B-B14F-4D97-AF65-F5344CB8AC3E}">
-        <p14:creationId xmlns:p14="http://schemas.microsoft.com/office/powerpoint/2010/main" val="2485274408"/>
+        <p14:creationId xmlns:p14="http://schemas.microsoft.com/office/powerpoint/2010/main" val="4002144936"/>
       </p:ext>
     </p:extLst>
   </p:cSld>
@@ -30884,7 +31145,7 @@
           <a:p>
             <a:r>
               <a:rPr lang="en-US" dirty="0"/>
-              <a:t>Will change this once we figure it out</a:t>
+              <a:t>Roma</a:t>
             </a:r>
           </a:p>
         </p:txBody>
@@ -30906,7 +31167,7 @@
           <a:p>
             <a:fld id="{1B409B6C-98DA-45B7-B60D-BE2AEAD4CE1B}" type="slidenum">
               <a:rPr lang="en-US" smtClean="0"/>
-              <a:t>9</a:t>
+              <a:t>8</a:t>
             </a:fld>
             <a:endParaRPr lang="en-US"/>
           </a:p>
@@ -30915,7 +31176,7 @@
     </p:spTree>
     <p:extLst>
       <p:ext uri="{BB962C8B-B14F-4D97-AF65-F5344CB8AC3E}">
-        <p14:creationId xmlns:p14="http://schemas.microsoft.com/office/powerpoint/2010/main" val="20229575"/>
+        <p14:creationId xmlns:p14="http://schemas.microsoft.com/office/powerpoint/2010/main" val="2485274408"/>
       </p:ext>
     </p:extLst>
   </p:cSld>
@@ -30971,7 +31232,7 @@
           <a:p>
             <a:r>
               <a:rPr lang="en-US" dirty="0"/>
-              <a:t>Will adjust this after meeting wed. </a:t>
+              <a:t>Roma</a:t>
             </a:r>
           </a:p>
         </p:txBody>
@@ -30993,7 +31254,7 @@
           <a:p>
             <a:fld id="{1B409B6C-98DA-45B7-B60D-BE2AEAD4CE1B}" type="slidenum">
               <a:rPr lang="en-US" smtClean="0"/>
-              <a:t>12</a:t>
+              <a:t>9</a:t>
             </a:fld>
             <a:endParaRPr lang="en-US"/>
           </a:p>
@@ -31002,7 +31263,7 @@
     </p:spTree>
     <p:extLst>
       <p:ext uri="{BB962C8B-B14F-4D97-AF65-F5344CB8AC3E}">
-        <p14:creationId xmlns:p14="http://schemas.microsoft.com/office/powerpoint/2010/main" val="3341856115"/>
+        <p14:creationId xmlns:p14="http://schemas.microsoft.com/office/powerpoint/2010/main" val="20229575"/>
       </p:ext>
     </p:extLst>
   </p:cSld>
@@ -31069,7 +31330,7 @@
           <a:noFill/>
           <a:extLst>
             <a:ext uri="{909E8E84-426E-40dd-AFC4-6F175D3DCCD1}">
-              <a14:hiddenFill xmlns="" xmlns:a14="http://schemas.microsoft.com/office/drawing/2010/main">
+              <a14:hiddenFill xmlns:a14="http://schemas.microsoft.com/office/drawing/2010/main" xmlns="">
                 <a:solidFill>
                   <a:srgbClr val="FFFFFF"/>
                 </a:solidFill>
@@ -31129,7 +31390,7 @@
             </a:ln>
             <a:extLst>
               <a:ext uri="{91240B29-F687-4f45-9708-019B960494DF}">
-                <a14:hiddenLine xmlns="" xmlns:a14="http://schemas.microsoft.com/office/drawing/2010/main" w="9525">
+                <a14:hiddenLine xmlns:a14="http://schemas.microsoft.com/office/drawing/2010/main" xmlns="" w="9525">
                   <a:solidFill>
                     <a:srgbClr val="000000"/>
                   </a:solidFill>
@@ -31140,6 +31401,13 @@
               </a:ext>
             </a:extLst>
           </p:spPr>
+          <p:txBody>
+            <a:bodyPr/>
+            <a:lstStyle/>
+            <a:p>
+              <a:endParaRPr lang="en-US"/>
+            </a:p>
+          </p:txBody>
         </p:sp>
         <p:sp>
           <p:nvSpPr>
@@ -31219,7 +31487,7 @@
             </a:ln>
             <a:extLst>
               <a:ext uri="{91240B29-F687-4f45-9708-019B960494DF}">
-                <a14:hiddenLine xmlns="" xmlns:a14="http://schemas.microsoft.com/office/drawing/2010/main" w="9525">
+                <a14:hiddenLine xmlns:a14="http://schemas.microsoft.com/office/drawing/2010/main" xmlns="" w="9525">
                   <a:solidFill>
                     <a:srgbClr val="000000"/>
                   </a:solidFill>
@@ -31230,6 +31498,13 @@
               </a:ext>
             </a:extLst>
           </p:spPr>
+          <p:txBody>
+            <a:bodyPr/>
+            <a:lstStyle/>
+            <a:p>
+              <a:endParaRPr lang="en-US"/>
+            </a:p>
+          </p:txBody>
         </p:sp>
         <p:sp>
           <p:nvSpPr>
@@ -31309,7 +31584,7 @@
             </a:ln>
             <a:extLst>
               <a:ext uri="{91240B29-F687-4f45-9708-019B960494DF}">
-                <a14:hiddenLine xmlns="" xmlns:a14="http://schemas.microsoft.com/office/drawing/2010/main" w="9525">
+                <a14:hiddenLine xmlns:a14="http://schemas.microsoft.com/office/drawing/2010/main" xmlns="" w="9525">
                   <a:solidFill>
                     <a:srgbClr val="000000"/>
                   </a:solidFill>
@@ -31320,6 +31595,13 @@
               </a:ext>
             </a:extLst>
           </p:spPr>
+          <p:txBody>
+            <a:bodyPr/>
+            <a:lstStyle/>
+            <a:p>
+              <a:endParaRPr lang="en-US"/>
+            </a:p>
+          </p:txBody>
         </p:sp>
         <p:sp>
           <p:nvSpPr>
@@ -31343,7 +31625,7 @@
             </a:ln>
             <a:extLst>
               <a:ext uri="{91240B29-F687-4f45-9708-019B960494DF}">
-                <a14:hiddenLine xmlns="" xmlns:a14="http://schemas.microsoft.com/office/drawing/2010/main" w="9525">
+                <a14:hiddenLine xmlns:a14="http://schemas.microsoft.com/office/drawing/2010/main" xmlns="" w="9525">
                   <a:solidFill>
                     <a:srgbClr val="000000"/>
                   </a:solidFill>
@@ -31354,6 +31636,13 @@
               </a:ext>
             </a:extLst>
           </p:spPr>
+          <p:txBody>
+            <a:bodyPr/>
+            <a:lstStyle/>
+            <a:p>
+              <a:endParaRPr lang="en-US"/>
+            </a:p>
+          </p:txBody>
         </p:sp>
         <p:sp>
           <p:nvSpPr>
@@ -31433,7 +31722,7 @@
             </a:ln>
             <a:extLst>
               <a:ext uri="{91240B29-F687-4f45-9708-019B960494DF}">
-                <a14:hiddenLine xmlns="" xmlns:a14="http://schemas.microsoft.com/office/drawing/2010/main" w="9525">
+                <a14:hiddenLine xmlns:a14="http://schemas.microsoft.com/office/drawing/2010/main" xmlns="" w="9525">
                   <a:solidFill>
                     <a:srgbClr val="000000"/>
                   </a:solidFill>
@@ -31444,6 +31733,13 @@
               </a:ext>
             </a:extLst>
           </p:spPr>
+          <p:txBody>
+            <a:bodyPr/>
+            <a:lstStyle/>
+            <a:p>
+              <a:endParaRPr lang="en-US"/>
+            </a:p>
+          </p:txBody>
         </p:sp>
         <p:sp>
           <p:nvSpPr>
@@ -31495,7 +31791,7 @@
             </a:ln>
             <a:extLst>
               <a:ext uri="{91240B29-F687-4f45-9708-019B960494DF}">
-                <a14:hiddenLine xmlns="" xmlns:a14="http://schemas.microsoft.com/office/drawing/2010/main" w="9525">
+                <a14:hiddenLine xmlns:a14="http://schemas.microsoft.com/office/drawing/2010/main" xmlns="" w="9525">
                   <a:solidFill>
                     <a:srgbClr val="000000"/>
                   </a:solidFill>
@@ -31506,6 +31802,13 @@
               </a:ext>
             </a:extLst>
           </p:spPr>
+          <p:txBody>
+            <a:bodyPr/>
+            <a:lstStyle/>
+            <a:p>
+              <a:endParaRPr lang="en-US"/>
+            </a:p>
+          </p:txBody>
         </p:sp>
         <p:sp>
           <p:nvSpPr>
@@ -31557,7 +31860,7 @@
             </a:ln>
             <a:extLst>
               <a:ext uri="{91240B29-F687-4f45-9708-019B960494DF}">
-                <a14:hiddenLine xmlns="" xmlns:a14="http://schemas.microsoft.com/office/drawing/2010/main" w="9525">
+                <a14:hiddenLine xmlns:a14="http://schemas.microsoft.com/office/drawing/2010/main" xmlns="" w="9525">
                   <a:solidFill>
                     <a:srgbClr val="000000"/>
                   </a:solidFill>
@@ -31568,6 +31871,13 @@
               </a:ext>
             </a:extLst>
           </p:spPr>
+          <p:txBody>
+            <a:bodyPr/>
+            <a:lstStyle/>
+            <a:p>
+              <a:endParaRPr lang="en-US"/>
+            </a:p>
+          </p:txBody>
         </p:sp>
         <p:sp>
           <p:nvSpPr>
@@ -31647,7 +31957,7 @@
             </a:ln>
             <a:extLst>
               <a:ext uri="{91240B29-F687-4f45-9708-019B960494DF}">
-                <a14:hiddenLine xmlns="" xmlns:a14="http://schemas.microsoft.com/office/drawing/2010/main" w="9525">
+                <a14:hiddenLine xmlns:a14="http://schemas.microsoft.com/office/drawing/2010/main" xmlns="" w="9525">
                   <a:solidFill>
                     <a:srgbClr val="000000"/>
                   </a:solidFill>
@@ -31658,6 +31968,13 @@
               </a:ext>
             </a:extLst>
           </p:spPr>
+          <p:txBody>
+            <a:bodyPr/>
+            <a:lstStyle/>
+            <a:p>
+              <a:endParaRPr lang="en-US"/>
+            </a:p>
+          </p:txBody>
         </p:sp>
         <p:sp>
           <p:nvSpPr>
@@ -31709,7 +32026,7 @@
             </a:ln>
             <a:extLst>
               <a:ext uri="{91240B29-F687-4f45-9708-019B960494DF}">
-                <a14:hiddenLine xmlns="" xmlns:a14="http://schemas.microsoft.com/office/drawing/2010/main" w="9525">
+                <a14:hiddenLine xmlns:a14="http://schemas.microsoft.com/office/drawing/2010/main" xmlns="" w="9525">
                   <a:solidFill>
                     <a:srgbClr val="000000"/>
                   </a:solidFill>
@@ -31720,6 +32037,13 @@
               </a:ext>
             </a:extLst>
           </p:spPr>
+          <p:txBody>
+            <a:bodyPr/>
+            <a:lstStyle/>
+            <a:p>
+              <a:endParaRPr lang="en-US"/>
+            </a:p>
+          </p:txBody>
         </p:sp>
         <p:sp>
           <p:nvSpPr>
@@ -31771,7 +32095,7 @@
             </a:ln>
             <a:extLst>
               <a:ext uri="{91240B29-F687-4f45-9708-019B960494DF}">
-                <a14:hiddenLine xmlns="" xmlns:a14="http://schemas.microsoft.com/office/drawing/2010/main" w="9525">
+                <a14:hiddenLine xmlns:a14="http://schemas.microsoft.com/office/drawing/2010/main" xmlns="" w="9525">
                   <a:solidFill>
                     <a:srgbClr val="000000"/>
                   </a:solidFill>
@@ -31782,6 +32106,13 @@
               </a:ext>
             </a:extLst>
           </p:spPr>
+          <p:txBody>
+            <a:bodyPr/>
+            <a:lstStyle/>
+            <a:p>
+              <a:endParaRPr lang="en-US"/>
+            </a:p>
+          </p:txBody>
         </p:sp>
         <p:sp>
           <p:nvSpPr>
@@ -31861,7 +32192,7 @@
             </a:ln>
             <a:extLst>
               <a:ext uri="{91240B29-F687-4f45-9708-019B960494DF}">
-                <a14:hiddenLine xmlns="" xmlns:a14="http://schemas.microsoft.com/office/drawing/2010/main" w="9525">
+                <a14:hiddenLine xmlns:a14="http://schemas.microsoft.com/office/drawing/2010/main" xmlns="" w="9525">
                   <a:solidFill>
                     <a:srgbClr val="000000"/>
                   </a:solidFill>
@@ -31872,6 +32203,13 @@
               </a:ext>
             </a:extLst>
           </p:spPr>
+          <p:txBody>
+            <a:bodyPr/>
+            <a:lstStyle/>
+            <a:p>
+              <a:endParaRPr lang="en-US"/>
+            </a:p>
+          </p:txBody>
         </p:sp>
         <p:sp>
           <p:nvSpPr>
@@ -31951,7 +32289,7 @@
             </a:ln>
             <a:extLst>
               <a:ext uri="{91240B29-F687-4f45-9708-019B960494DF}">
-                <a14:hiddenLine xmlns="" xmlns:a14="http://schemas.microsoft.com/office/drawing/2010/main" w="9525">
+                <a14:hiddenLine xmlns:a14="http://schemas.microsoft.com/office/drawing/2010/main" xmlns="" w="9525">
                   <a:solidFill>
                     <a:srgbClr val="000000"/>
                   </a:solidFill>
@@ -31962,6 +32300,13 @@
               </a:ext>
             </a:extLst>
           </p:spPr>
+          <p:txBody>
+            <a:bodyPr/>
+            <a:lstStyle/>
+            <a:p>
+              <a:endParaRPr lang="en-US"/>
+            </a:p>
+          </p:txBody>
         </p:sp>
         <p:sp>
           <p:nvSpPr>
@@ -32013,7 +32358,7 @@
             </a:ln>
             <a:extLst>
               <a:ext uri="{91240B29-F687-4f45-9708-019B960494DF}">
-                <a14:hiddenLine xmlns="" xmlns:a14="http://schemas.microsoft.com/office/drawing/2010/main" w="9525">
+                <a14:hiddenLine xmlns:a14="http://schemas.microsoft.com/office/drawing/2010/main" xmlns="" w="9525">
                   <a:solidFill>
                     <a:srgbClr val="000000"/>
                   </a:solidFill>
@@ -32024,6 +32369,13 @@
               </a:ext>
             </a:extLst>
           </p:spPr>
+          <p:txBody>
+            <a:bodyPr/>
+            <a:lstStyle/>
+            <a:p>
+              <a:endParaRPr lang="en-US"/>
+            </a:p>
+          </p:txBody>
         </p:sp>
         <p:sp>
           <p:nvSpPr>
@@ -32123,7 +32475,7 @@
             </a:ln>
             <a:extLst>
               <a:ext uri="{91240B29-F687-4f45-9708-019B960494DF}">
-                <a14:hiddenLine xmlns="" xmlns:a14="http://schemas.microsoft.com/office/drawing/2010/main" w="9525">
+                <a14:hiddenLine xmlns:a14="http://schemas.microsoft.com/office/drawing/2010/main" xmlns="" w="9525">
                   <a:solidFill>
                     <a:srgbClr val="000000"/>
                   </a:solidFill>
@@ -32134,6 +32486,13 @@
               </a:ext>
             </a:extLst>
           </p:spPr>
+          <p:txBody>
+            <a:bodyPr/>
+            <a:lstStyle/>
+            <a:p>
+              <a:endParaRPr lang="en-US"/>
+            </a:p>
+          </p:txBody>
         </p:sp>
         <p:sp>
           <p:nvSpPr>
@@ -32185,7 +32544,7 @@
             </a:ln>
             <a:extLst>
               <a:ext uri="{91240B29-F687-4f45-9708-019B960494DF}">
-                <a14:hiddenLine xmlns="" xmlns:a14="http://schemas.microsoft.com/office/drawing/2010/main" w="9525">
+                <a14:hiddenLine xmlns:a14="http://schemas.microsoft.com/office/drawing/2010/main" xmlns="" w="9525">
                   <a:solidFill>
                     <a:srgbClr val="000000"/>
                   </a:solidFill>
@@ -32196,6 +32555,13 @@
               </a:ext>
             </a:extLst>
           </p:spPr>
+          <p:txBody>
+            <a:bodyPr/>
+            <a:lstStyle/>
+            <a:p>
+              <a:endParaRPr lang="en-US"/>
+            </a:p>
+          </p:txBody>
         </p:sp>
         <p:sp>
           <p:nvSpPr>
@@ -32275,7 +32641,7 @@
             </a:ln>
             <a:extLst>
               <a:ext uri="{91240B29-F687-4f45-9708-019B960494DF}">
-                <a14:hiddenLine xmlns="" xmlns:a14="http://schemas.microsoft.com/office/drawing/2010/main" w="9525">
+                <a14:hiddenLine xmlns:a14="http://schemas.microsoft.com/office/drawing/2010/main" xmlns="" w="9525">
                   <a:solidFill>
                     <a:srgbClr val="000000"/>
                   </a:solidFill>
@@ -32286,6 +32652,13 @@
               </a:ext>
             </a:extLst>
           </p:spPr>
+          <p:txBody>
+            <a:bodyPr/>
+            <a:lstStyle/>
+            <a:p>
+              <a:endParaRPr lang="en-US"/>
+            </a:p>
+          </p:txBody>
         </p:sp>
         <p:sp>
           <p:nvSpPr>
@@ -32365,7 +32738,7 @@
             </a:ln>
             <a:extLst>
               <a:ext uri="{91240B29-F687-4f45-9708-019B960494DF}">
-                <a14:hiddenLine xmlns="" xmlns:a14="http://schemas.microsoft.com/office/drawing/2010/main" w="9525">
+                <a14:hiddenLine xmlns:a14="http://schemas.microsoft.com/office/drawing/2010/main" xmlns="" w="9525">
                   <a:solidFill>
                     <a:srgbClr val="000000"/>
                   </a:solidFill>
@@ -32376,6 +32749,13 @@
               </a:ext>
             </a:extLst>
           </p:spPr>
+          <p:txBody>
+            <a:bodyPr/>
+            <a:lstStyle/>
+            <a:p>
+              <a:endParaRPr lang="en-US"/>
+            </a:p>
+          </p:txBody>
         </p:sp>
         <p:sp>
           <p:nvSpPr>
@@ -32427,7 +32807,7 @@
             </a:ln>
             <a:extLst>
               <a:ext uri="{91240B29-F687-4f45-9708-019B960494DF}">
-                <a14:hiddenLine xmlns="" xmlns:a14="http://schemas.microsoft.com/office/drawing/2010/main" w="9525">
+                <a14:hiddenLine xmlns:a14="http://schemas.microsoft.com/office/drawing/2010/main" xmlns="" w="9525">
                   <a:solidFill>
                     <a:srgbClr val="000000"/>
                   </a:solidFill>
@@ -32438,6 +32818,13 @@
               </a:ext>
             </a:extLst>
           </p:spPr>
+          <p:txBody>
+            <a:bodyPr/>
+            <a:lstStyle/>
+            <a:p>
+              <a:endParaRPr lang="en-US"/>
+            </a:p>
+          </p:txBody>
         </p:sp>
         <p:sp>
           <p:nvSpPr>
@@ -32517,7 +32904,7 @@
             </a:ln>
             <a:extLst>
               <a:ext uri="{91240B29-F687-4f45-9708-019B960494DF}">
-                <a14:hiddenLine xmlns="" xmlns:a14="http://schemas.microsoft.com/office/drawing/2010/main" w="9525">
+                <a14:hiddenLine xmlns:a14="http://schemas.microsoft.com/office/drawing/2010/main" xmlns="" w="9525">
                   <a:solidFill>
                     <a:srgbClr val="000000"/>
                   </a:solidFill>
@@ -32528,6 +32915,13 @@
               </a:ext>
             </a:extLst>
           </p:spPr>
+          <p:txBody>
+            <a:bodyPr/>
+            <a:lstStyle/>
+            <a:p>
+              <a:endParaRPr lang="en-US"/>
+            </a:p>
+          </p:txBody>
         </p:sp>
         <p:sp>
           <p:nvSpPr>
@@ -32607,7 +33001,7 @@
             </a:ln>
             <a:extLst>
               <a:ext uri="{91240B29-F687-4f45-9708-019B960494DF}">
-                <a14:hiddenLine xmlns="" xmlns:a14="http://schemas.microsoft.com/office/drawing/2010/main" w="9525">
+                <a14:hiddenLine xmlns:a14="http://schemas.microsoft.com/office/drawing/2010/main" xmlns="" w="9525">
                   <a:solidFill>
                     <a:srgbClr val="000000"/>
                   </a:solidFill>
@@ -32618,6 +33012,13 @@
               </a:ext>
             </a:extLst>
           </p:spPr>
+          <p:txBody>
+            <a:bodyPr/>
+            <a:lstStyle/>
+            <a:p>
+              <a:endParaRPr lang="en-US"/>
+            </a:p>
+          </p:txBody>
         </p:sp>
         <p:sp>
           <p:nvSpPr>
@@ -32663,7 +33064,7 @@
             </a:ln>
             <a:extLst>
               <a:ext uri="{91240B29-F687-4f45-9708-019B960494DF}">
-                <a14:hiddenLine xmlns="" xmlns:a14="http://schemas.microsoft.com/office/drawing/2010/main" w="9525">
+                <a14:hiddenLine xmlns:a14="http://schemas.microsoft.com/office/drawing/2010/main" xmlns="" w="9525">
                   <a:solidFill>
                     <a:srgbClr val="000000"/>
                   </a:solidFill>
@@ -32674,6 +33075,13 @@
               </a:ext>
             </a:extLst>
           </p:spPr>
+          <p:txBody>
+            <a:bodyPr/>
+            <a:lstStyle/>
+            <a:p>
+              <a:endParaRPr lang="en-US"/>
+            </a:p>
+          </p:txBody>
         </p:sp>
         <p:sp>
           <p:nvSpPr>
@@ -32753,7 +33161,7 @@
             </a:ln>
             <a:extLst>
               <a:ext uri="{91240B29-F687-4f45-9708-019B960494DF}">
-                <a14:hiddenLine xmlns="" xmlns:a14="http://schemas.microsoft.com/office/drawing/2010/main" w="9525">
+                <a14:hiddenLine xmlns:a14="http://schemas.microsoft.com/office/drawing/2010/main" xmlns="" w="9525">
                   <a:solidFill>
                     <a:srgbClr val="000000"/>
                   </a:solidFill>
@@ -32764,6 +33172,13 @@
               </a:ext>
             </a:extLst>
           </p:spPr>
+          <p:txBody>
+            <a:bodyPr/>
+            <a:lstStyle/>
+            <a:p>
+              <a:endParaRPr lang="en-US"/>
+            </a:p>
+          </p:txBody>
         </p:sp>
         <p:sp>
           <p:nvSpPr>
@@ -32809,7 +33224,7 @@
             </a:ln>
             <a:extLst>
               <a:ext uri="{91240B29-F687-4f45-9708-019B960494DF}">
-                <a14:hiddenLine xmlns="" xmlns:a14="http://schemas.microsoft.com/office/drawing/2010/main" w="9525">
+                <a14:hiddenLine xmlns:a14="http://schemas.microsoft.com/office/drawing/2010/main" xmlns="" w="9525">
                   <a:solidFill>
                     <a:srgbClr val="000000"/>
                   </a:solidFill>
@@ -32820,6 +33235,13 @@
               </a:ext>
             </a:extLst>
           </p:spPr>
+          <p:txBody>
+            <a:bodyPr/>
+            <a:lstStyle/>
+            <a:p>
+              <a:endParaRPr lang="en-US"/>
+            </a:p>
+          </p:txBody>
         </p:sp>
         <p:sp>
           <p:nvSpPr>
@@ -32899,7 +33321,7 @@
             </a:ln>
             <a:extLst>
               <a:ext uri="{91240B29-F687-4f45-9708-019B960494DF}">
-                <a14:hiddenLine xmlns="" xmlns:a14="http://schemas.microsoft.com/office/drawing/2010/main" w="9525">
+                <a14:hiddenLine xmlns:a14="http://schemas.microsoft.com/office/drawing/2010/main" xmlns="" w="9525">
                   <a:solidFill>
                     <a:srgbClr val="000000"/>
                   </a:solidFill>
@@ -32910,6 +33332,13 @@
               </a:ext>
             </a:extLst>
           </p:spPr>
+          <p:txBody>
+            <a:bodyPr/>
+            <a:lstStyle/>
+            <a:p>
+              <a:endParaRPr lang="en-US"/>
+            </a:p>
+          </p:txBody>
         </p:sp>
         <p:sp>
           <p:nvSpPr>
@@ -32967,7 +33396,7 @@
             </a:ln>
             <a:extLst>
               <a:ext uri="{91240B29-F687-4f45-9708-019B960494DF}">
-                <a14:hiddenLine xmlns="" xmlns:a14="http://schemas.microsoft.com/office/drawing/2010/main" w="9525">
+                <a14:hiddenLine xmlns:a14="http://schemas.microsoft.com/office/drawing/2010/main" xmlns="" w="9525">
                   <a:solidFill>
                     <a:srgbClr val="000000"/>
                   </a:solidFill>
@@ -32978,6 +33407,13 @@
               </a:ext>
             </a:extLst>
           </p:spPr>
+          <p:txBody>
+            <a:bodyPr/>
+            <a:lstStyle/>
+            <a:p>
+              <a:endParaRPr lang="en-US"/>
+            </a:p>
+          </p:txBody>
         </p:sp>
         <p:sp>
           <p:nvSpPr>
@@ -33057,7 +33493,7 @@
             </a:ln>
             <a:extLst>
               <a:ext uri="{91240B29-F687-4f45-9708-019B960494DF}">
-                <a14:hiddenLine xmlns="" xmlns:a14="http://schemas.microsoft.com/office/drawing/2010/main" w="9525">
+                <a14:hiddenLine xmlns:a14="http://schemas.microsoft.com/office/drawing/2010/main" xmlns="" w="9525">
                   <a:solidFill>
                     <a:srgbClr val="000000"/>
                   </a:solidFill>
@@ -33068,6 +33504,13 @@
               </a:ext>
             </a:extLst>
           </p:spPr>
+          <p:txBody>
+            <a:bodyPr/>
+            <a:lstStyle/>
+            <a:p>
+              <a:endParaRPr lang="en-US"/>
+            </a:p>
+          </p:txBody>
         </p:sp>
         <p:sp>
           <p:nvSpPr>
@@ -33125,7 +33568,7 @@
             </a:ln>
             <a:extLst>
               <a:ext uri="{91240B29-F687-4f45-9708-019B960494DF}">
-                <a14:hiddenLine xmlns="" xmlns:a14="http://schemas.microsoft.com/office/drawing/2010/main" w="9525">
+                <a14:hiddenLine xmlns:a14="http://schemas.microsoft.com/office/drawing/2010/main" xmlns="" w="9525">
                   <a:solidFill>
                     <a:srgbClr val="000000"/>
                   </a:solidFill>
@@ -33136,6 +33579,13 @@
               </a:ext>
             </a:extLst>
           </p:spPr>
+          <p:txBody>
+            <a:bodyPr/>
+            <a:lstStyle/>
+            <a:p>
+              <a:endParaRPr lang="en-US"/>
+            </a:p>
+          </p:txBody>
         </p:sp>
         <p:sp>
           <p:nvSpPr>
@@ -33215,7 +33665,7 @@
             </a:ln>
             <a:extLst>
               <a:ext uri="{91240B29-F687-4f45-9708-019B960494DF}">
-                <a14:hiddenLine xmlns="" xmlns:a14="http://schemas.microsoft.com/office/drawing/2010/main" w="9525">
+                <a14:hiddenLine xmlns:a14="http://schemas.microsoft.com/office/drawing/2010/main" xmlns="" w="9525">
                   <a:solidFill>
                     <a:srgbClr val="000000"/>
                   </a:solidFill>
@@ -33226,6 +33676,13 @@
               </a:ext>
             </a:extLst>
           </p:spPr>
+          <p:txBody>
+            <a:bodyPr/>
+            <a:lstStyle/>
+            <a:p>
+              <a:endParaRPr lang="en-US"/>
+            </a:p>
+          </p:txBody>
         </p:sp>
         <p:sp>
           <p:nvSpPr>
@@ -33249,7 +33706,7 @@
             </a:ln>
             <a:extLst>
               <a:ext uri="{91240B29-F687-4f45-9708-019B960494DF}">
-                <a14:hiddenLine xmlns="" xmlns:a14="http://schemas.microsoft.com/office/drawing/2010/main" w="9525">
+                <a14:hiddenLine xmlns:a14="http://schemas.microsoft.com/office/drawing/2010/main" xmlns="" w="9525">
                   <a:solidFill>
                     <a:srgbClr val="000000"/>
                   </a:solidFill>
@@ -33260,6 +33717,13 @@
               </a:ext>
             </a:extLst>
           </p:spPr>
+          <p:txBody>
+            <a:bodyPr/>
+            <a:lstStyle/>
+            <a:p>
+              <a:endParaRPr lang="en-US"/>
+            </a:p>
+          </p:txBody>
         </p:sp>
         <p:sp>
           <p:nvSpPr>
@@ -33339,7 +33803,7 @@
             </a:ln>
             <a:extLst>
               <a:ext uri="{91240B29-F687-4f45-9708-019B960494DF}">
-                <a14:hiddenLine xmlns="" xmlns:a14="http://schemas.microsoft.com/office/drawing/2010/main" w="9525">
+                <a14:hiddenLine xmlns:a14="http://schemas.microsoft.com/office/drawing/2010/main" xmlns="" w="9525">
                   <a:solidFill>
                     <a:srgbClr val="000000"/>
                   </a:solidFill>
@@ -33350,6 +33814,13 @@
               </a:ext>
             </a:extLst>
           </p:spPr>
+          <p:txBody>
+            <a:bodyPr/>
+            <a:lstStyle/>
+            <a:p>
+              <a:endParaRPr lang="en-US"/>
+            </a:p>
+          </p:txBody>
         </p:sp>
         <p:sp>
           <p:nvSpPr>
@@ -33401,7 +33872,7 @@
             </a:ln>
             <a:extLst>
               <a:ext uri="{91240B29-F687-4f45-9708-019B960494DF}">
-                <a14:hiddenLine xmlns="" xmlns:a14="http://schemas.microsoft.com/office/drawing/2010/main" w="9525">
+                <a14:hiddenLine xmlns:a14="http://schemas.microsoft.com/office/drawing/2010/main" xmlns="" w="9525">
                   <a:solidFill>
                     <a:srgbClr val="000000"/>
                   </a:solidFill>
@@ -33412,6 +33883,13 @@
               </a:ext>
             </a:extLst>
           </p:spPr>
+          <p:txBody>
+            <a:bodyPr/>
+            <a:lstStyle/>
+            <a:p>
+              <a:endParaRPr lang="en-US"/>
+            </a:p>
+          </p:txBody>
         </p:sp>
         <p:sp>
           <p:nvSpPr>
@@ -33463,7 +33941,7 @@
             </a:ln>
             <a:extLst>
               <a:ext uri="{91240B29-F687-4f45-9708-019B960494DF}">
-                <a14:hiddenLine xmlns="" xmlns:a14="http://schemas.microsoft.com/office/drawing/2010/main" w="9525">
+                <a14:hiddenLine xmlns:a14="http://schemas.microsoft.com/office/drawing/2010/main" xmlns="" w="9525">
                   <a:solidFill>
                     <a:srgbClr val="000000"/>
                   </a:solidFill>
@@ -33474,6 +33952,13 @@
               </a:ext>
             </a:extLst>
           </p:spPr>
+          <p:txBody>
+            <a:bodyPr/>
+            <a:lstStyle/>
+            <a:p>
+              <a:endParaRPr lang="en-US"/>
+            </a:p>
+          </p:txBody>
         </p:sp>
         <p:sp>
           <p:nvSpPr>
@@ -33553,7 +34038,7 @@
             </a:ln>
             <a:extLst>
               <a:ext uri="{91240B29-F687-4f45-9708-019B960494DF}">
-                <a14:hiddenLine xmlns="" xmlns:a14="http://schemas.microsoft.com/office/drawing/2010/main" w="9525">
+                <a14:hiddenLine xmlns:a14="http://schemas.microsoft.com/office/drawing/2010/main" xmlns="" w="9525">
                   <a:solidFill>
                     <a:srgbClr val="000000"/>
                   </a:solidFill>
@@ -33564,6 +34049,13 @@
               </a:ext>
             </a:extLst>
           </p:spPr>
+          <p:txBody>
+            <a:bodyPr/>
+            <a:lstStyle/>
+            <a:p>
+              <a:endParaRPr lang="en-US"/>
+            </a:p>
+          </p:txBody>
         </p:sp>
         <p:sp>
           <p:nvSpPr>
@@ -33621,7 +34113,7 @@
             </a:ln>
             <a:extLst>
               <a:ext uri="{91240B29-F687-4f45-9708-019B960494DF}">
-                <a14:hiddenLine xmlns="" xmlns:a14="http://schemas.microsoft.com/office/drawing/2010/main" w="9525">
+                <a14:hiddenLine xmlns:a14="http://schemas.microsoft.com/office/drawing/2010/main" xmlns="" w="9525">
                   <a:solidFill>
                     <a:srgbClr val="000000"/>
                   </a:solidFill>
@@ -33632,6 +34124,13 @@
               </a:ext>
             </a:extLst>
           </p:spPr>
+          <p:txBody>
+            <a:bodyPr/>
+            <a:lstStyle/>
+            <a:p>
+              <a:endParaRPr lang="en-US"/>
+            </a:p>
+          </p:txBody>
         </p:sp>
         <p:sp>
           <p:nvSpPr>
@@ -33683,7 +34182,7 @@
             </a:ln>
             <a:extLst>
               <a:ext uri="{91240B29-F687-4f45-9708-019B960494DF}">
-                <a14:hiddenLine xmlns="" xmlns:a14="http://schemas.microsoft.com/office/drawing/2010/main" w="9525">
+                <a14:hiddenLine xmlns:a14="http://schemas.microsoft.com/office/drawing/2010/main" xmlns="" w="9525">
                   <a:solidFill>
                     <a:srgbClr val="000000"/>
                   </a:solidFill>
@@ -33694,6 +34193,13 @@
               </a:ext>
             </a:extLst>
           </p:spPr>
+          <p:txBody>
+            <a:bodyPr/>
+            <a:lstStyle/>
+            <a:p>
+              <a:endParaRPr lang="en-US"/>
+            </a:p>
+          </p:txBody>
         </p:sp>
         <p:sp>
           <p:nvSpPr>
@@ -33773,7 +34279,7 @@
             </a:ln>
             <a:extLst>
               <a:ext uri="{91240B29-F687-4f45-9708-019B960494DF}">
-                <a14:hiddenLine xmlns="" xmlns:a14="http://schemas.microsoft.com/office/drawing/2010/main" w="9525">
+                <a14:hiddenLine xmlns:a14="http://schemas.microsoft.com/office/drawing/2010/main" xmlns="" w="9525">
                   <a:solidFill>
                     <a:srgbClr val="000000"/>
                   </a:solidFill>
@@ -33784,6 +34290,13 @@
               </a:ext>
             </a:extLst>
           </p:spPr>
+          <p:txBody>
+            <a:bodyPr/>
+            <a:lstStyle/>
+            <a:p>
+              <a:endParaRPr lang="en-US"/>
+            </a:p>
+          </p:txBody>
         </p:sp>
         <p:sp>
           <p:nvSpPr>
@@ -33835,7 +34348,7 @@
             </a:ln>
             <a:extLst>
               <a:ext uri="{91240B29-F687-4f45-9708-019B960494DF}">
-                <a14:hiddenLine xmlns="" xmlns:a14="http://schemas.microsoft.com/office/drawing/2010/main" w="9525">
+                <a14:hiddenLine xmlns:a14="http://schemas.microsoft.com/office/drawing/2010/main" xmlns="" w="9525">
                   <a:solidFill>
                     <a:srgbClr val="000000"/>
                   </a:solidFill>
@@ -33846,6 +34359,13 @@
               </a:ext>
             </a:extLst>
           </p:spPr>
+          <p:txBody>
+            <a:bodyPr/>
+            <a:lstStyle/>
+            <a:p>
+              <a:endParaRPr lang="en-US"/>
+            </a:p>
+          </p:txBody>
         </p:sp>
         <p:sp>
           <p:nvSpPr>
@@ -33925,7 +34445,7 @@
             </a:ln>
             <a:extLst>
               <a:ext uri="{91240B29-F687-4f45-9708-019B960494DF}">
-                <a14:hiddenLine xmlns="" xmlns:a14="http://schemas.microsoft.com/office/drawing/2010/main" w="9525">
+                <a14:hiddenLine xmlns:a14="http://schemas.microsoft.com/office/drawing/2010/main" xmlns="" w="9525">
                   <a:solidFill>
                     <a:srgbClr val="000000"/>
                   </a:solidFill>
@@ -33936,6 +34456,13 @@
               </a:ext>
             </a:extLst>
           </p:spPr>
+          <p:txBody>
+            <a:bodyPr/>
+            <a:lstStyle/>
+            <a:p>
+              <a:endParaRPr lang="en-US"/>
+            </a:p>
+          </p:txBody>
         </p:sp>
         <p:sp>
           <p:nvSpPr>
@@ -33987,7 +34514,7 @@
             </a:ln>
             <a:extLst>
               <a:ext uri="{91240B29-F687-4f45-9708-019B960494DF}">
-                <a14:hiddenLine xmlns="" xmlns:a14="http://schemas.microsoft.com/office/drawing/2010/main" w="9525">
+                <a14:hiddenLine xmlns:a14="http://schemas.microsoft.com/office/drawing/2010/main" xmlns="" w="9525">
                   <a:solidFill>
                     <a:srgbClr val="000000"/>
                   </a:solidFill>
@@ -33998,6 +34525,13 @@
               </a:ext>
             </a:extLst>
           </p:spPr>
+          <p:txBody>
+            <a:bodyPr/>
+            <a:lstStyle/>
+            <a:p>
+              <a:endParaRPr lang="en-US"/>
+            </a:p>
+          </p:txBody>
         </p:sp>
         <p:sp>
           <p:nvSpPr>
@@ -34077,7 +34611,7 @@
             </a:ln>
             <a:extLst>
               <a:ext uri="{91240B29-F687-4f45-9708-019B960494DF}">
-                <a14:hiddenLine xmlns="" xmlns:a14="http://schemas.microsoft.com/office/drawing/2010/main" w="9525">
+                <a14:hiddenLine xmlns:a14="http://schemas.microsoft.com/office/drawing/2010/main" xmlns="" w="9525">
                   <a:solidFill>
                     <a:srgbClr val="000000"/>
                   </a:solidFill>
@@ -34088,6 +34622,13 @@
               </a:ext>
             </a:extLst>
           </p:spPr>
+          <p:txBody>
+            <a:bodyPr/>
+            <a:lstStyle/>
+            <a:p>
+              <a:endParaRPr lang="en-US"/>
+            </a:p>
+          </p:txBody>
         </p:sp>
         <p:sp>
           <p:nvSpPr>
@@ -34111,7 +34652,7 @@
             </a:ln>
             <a:extLst>
               <a:ext uri="{91240B29-F687-4f45-9708-019B960494DF}">
-                <a14:hiddenLine xmlns="" xmlns:a14="http://schemas.microsoft.com/office/drawing/2010/main" w="9525">
+                <a14:hiddenLine xmlns:a14="http://schemas.microsoft.com/office/drawing/2010/main" xmlns="" w="9525">
                   <a:solidFill>
                     <a:srgbClr val="000000"/>
                   </a:solidFill>
@@ -34122,6 +34663,13 @@
               </a:ext>
             </a:extLst>
           </p:spPr>
+          <p:txBody>
+            <a:bodyPr/>
+            <a:lstStyle/>
+            <a:p>
+              <a:endParaRPr lang="en-US"/>
+            </a:p>
+          </p:txBody>
         </p:sp>
         <p:sp>
           <p:nvSpPr>
@@ -34176,7 +34724,7 @@
             </a:ln>
             <a:extLst>
               <a:ext uri="{91240B29-F687-4f45-9708-019B960494DF}">
-                <a14:hiddenLine xmlns="" xmlns:a14="http://schemas.microsoft.com/office/drawing/2010/main" w="9525">
+                <a14:hiddenLine xmlns:a14="http://schemas.microsoft.com/office/drawing/2010/main" xmlns="" w="9525">
                   <a:solidFill>
                     <a:srgbClr val="000000"/>
                   </a:solidFill>
@@ -34187,6 +34735,13 @@
               </a:ext>
             </a:extLst>
           </p:spPr>
+          <p:txBody>
+            <a:bodyPr/>
+            <a:lstStyle/>
+            <a:p>
+              <a:endParaRPr lang="en-US"/>
+            </a:p>
+          </p:txBody>
         </p:sp>
         <p:sp>
           <p:nvSpPr>
@@ -34266,7 +34821,7 @@
             </a:ln>
             <a:extLst>
               <a:ext uri="{91240B29-F687-4f45-9708-019B960494DF}">
-                <a14:hiddenLine xmlns="" xmlns:a14="http://schemas.microsoft.com/office/drawing/2010/main" w="9525">
+                <a14:hiddenLine xmlns:a14="http://schemas.microsoft.com/office/drawing/2010/main" xmlns="" w="9525">
                   <a:solidFill>
                     <a:srgbClr val="000000"/>
                   </a:solidFill>
@@ -34277,6 +34832,13 @@
               </a:ext>
             </a:extLst>
           </p:spPr>
+          <p:txBody>
+            <a:bodyPr/>
+            <a:lstStyle/>
+            <a:p>
+              <a:endParaRPr lang="en-US"/>
+            </a:p>
+          </p:txBody>
         </p:sp>
         <p:sp>
           <p:nvSpPr>
@@ -34328,7 +34890,7 @@
             </a:ln>
             <a:extLst>
               <a:ext uri="{91240B29-F687-4f45-9708-019B960494DF}">
-                <a14:hiddenLine xmlns="" xmlns:a14="http://schemas.microsoft.com/office/drawing/2010/main" w="9525">
+                <a14:hiddenLine xmlns:a14="http://schemas.microsoft.com/office/drawing/2010/main" xmlns="" w="9525">
                   <a:solidFill>
                     <a:srgbClr val="000000"/>
                   </a:solidFill>
@@ -34339,6 +34901,13 @@
               </a:ext>
             </a:extLst>
           </p:spPr>
+          <p:txBody>
+            <a:bodyPr/>
+            <a:lstStyle/>
+            <a:p>
+              <a:endParaRPr lang="en-US"/>
+            </a:p>
+          </p:txBody>
         </p:sp>
         <p:sp>
           <p:nvSpPr>
@@ -34418,7 +34987,7 @@
             </a:ln>
             <a:extLst>
               <a:ext uri="{91240B29-F687-4f45-9708-019B960494DF}">
-                <a14:hiddenLine xmlns="" xmlns:a14="http://schemas.microsoft.com/office/drawing/2010/main" w="9525">
+                <a14:hiddenLine xmlns:a14="http://schemas.microsoft.com/office/drawing/2010/main" xmlns="" w="9525">
                   <a:solidFill>
                     <a:srgbClr val="000000"/>
                   </a:solidFill>
@@ -34429,6 +34998,13 @@
               </a:ext>
             </a:extLst>
           </p:spPr>
+          <p:txBody>
+            <a:bodyPr/>
+            <a:lstStyle/>
+            <a:p>
+              <a:endParaRPr lang="en-US"/>
+            </a:p>
+          </p:txBody>
         </p:sp>
         <p:sp>
           <p:nvSpPr>
@@ -34508,7 +35084,7 @@
             </a:ln>
             <a:extLst>
               <a:ext uri="{91240B29-F687-4f45-9708-019B960494DF}">
-                <a14:hiddenLine xmlns="" xmlns:a14="http://schemas.microsoft.com/office/drawing/2010/main" w="9525">
+                <a14:hiddenLine xmlns:a14="http://schemas.microsoft.com/office/drawing/2010/main" xmlns="" w="9525">
                   <a:solidFill>
                     <a:srgbClr val="000000"/>
                   </a:solidFill>
@@ -34519,6 +35095,13 @@
               </a:ext>
             </a:extLst>
           </p:spPr>
+          <p:txBody>
+            <a:bodyPr/>
+            <a:lstStyle/>
+            <a:p>
+              <a:endParaRPr lang="en-US"/>
+            </a:p>
+          </p:txBody>
         </p:sp>
         <p:sp>
           <p:nvSpPr>
@@ -34573,7 +35156,7 @@
             </a:ln>
             <a:extLst>
               <a:ext uri="{91240B29-F687-4f45-9708-019B960494DF}">
-                <a14:hiddenLine xmlns="" xmlns:a14="http://schemas.microsoft.com/office/drawing/2010/main" w="9525">
+                <a14:hiddenLine xmlns:a14="http://schemas.microsoft.com/office/drawing/2010/main" xmlns="" w="9525">
                   <a:solidFill>
                     <a:srgbClr val="000000"/>
                   </a:solidFill>
@@ -34584,6 +35167,13 @@
               </a:ext>
             </a:extLst>
           </p:spPr>
+          <p:txBody>
+            <a:bodyPr/>
+            <a:lstStyle/>
+            <a:p>
+              <a:endParaRPr lang="en-US"/>
+            </a:p>
+          </p:txBody>
         </p:sp>
         <p:sp>
           <p:nvSpPr>
@@ -34635,7 +35225,7 @@
             </a:ln>
             <a:extLst>
               <a:ext uri="{91240B29-F687-4f45-9708-019B960494DF}">
-                <a14:hiddenLine xmlns="" xmlns:a14="http://schemas.microsoft.com/office/drawing/2010/main" w="9525">
+                <a14:hiddenLine xmlns:a14="http://schemas.microsoft.com/office/drawing/2010/main" xmlns="" w="9525">
                   <a:solidFill>
                     <a:srgbClr val="000000"/>
                   </a:solidFill>
@@ -34646,6 +35236,13 @@
               </a:ext>
             </a:extLst>
           </p:spPr>
+          <p:txBody>
+            <a:bodyPr/>
+            <a:lstStyle/>
+            <a:p>
+              <a:endParaRPr lang="en-US"/>
+            </a:p>
+          </p:txBody>
         </p:sp>
         <p:sp>
           <p:nvSpPr>
@@ -34725,7 +35322,7 @@
             </a:ln>
             <a:extLst>
               <a:ext uri="{91240B29-F687-4f45-9708-019B960494DF}">
-                <a14:hiddenLine xmlns="" xmlns:a14="http://schemas.microsoft.com/office/drawing/2010/main" w="9525">
+                <a14:hiddenLine xmlns:a14="http://schemas.microsoft.com/office/drawing/2010/main" xmlns="" w="9525">
                   <a:solidFill>
                     <a:srgbClr val="000000"/>
                   </a:solidFill>
@@ -34736,6 +35333,13 @@
               </a:ext>
             </a:extLst>
           </p:spPr>
+          <p:txBody>
+            <a:bodyPr/>
+            <a:lstStyle/>
+            <a:p>
+              <a:endParaRPr lang="en-US"/>
+            </a:p>
+          </p:txBody>
         </p:sp>
         <p:sp>
           <p:nvSpPr>
@@ -34815,7 +35419,7 @@
             </a:ln>
             <a:extLst>
               <a:ext uri="{91240B29-F687-4f45-9708-019B960494DF}">
-                <a14:hiddenLine xmlns="" xmlns:a14="http://schemas.microsoft.com/office/drawing/2010/main" w="9525">
+                <a14:hiddenLine xmlns:a14="http://schemas.microsoft.com/office/drawing/2010/main" xmlns="" w="9525">
                   <a:solidFill>
                     <a:srgbClr val="000000"/>
                   </a:solidFill>
@@ -34826,6 +35430,13 @@
               </a:ext>
             </a:extLst>
           </p:spPr>
+          <p:txBody>
+            <a:bodyPr/>
+            <a:lstStyle/>
+            <a:p>
+              <a:endParaRPr lang="en-US"/>
+            </a:p>
+          </p:txBody>
         </p:sp>
         <p:sp>
           <p:nvSpPr>
@@ -34877,7 +35488,7 @@
             </a:ln>
             <a:extLst>
               <a:ext uri="{91240B29-F687-4f45-9708-019B960494DF}">
-                <a14:hiddenLine xmlns="" xmlns:a14="http://schemas.microsoft.com/office/drawing/2010/main" w="9525">
+                <a14:hiddenLine xmlns:a14="http://schemas.microsoft.com/office/drawing/2010/main" xmlns="" w="9525">
                   <a:solidFill>
                     <a:srgbClr val="000000"/>
                   </a:solidFill>
@@ -34888,6 +35499,13 @@
               </a:ext>
             </a:extLst>
           </p:spPr>
+          <p:txBody>
+            <a:bodyPr/>
+            <a:lstStyle/>
+            <a:p>
+              <a:endParaRPr lang="en-US"/>
+            </a:p>
+          </p:txBody>
         </p:sp>
         <p:sp>
           <p:nvSpPr>
@@ -34997,7 +35615,7 @@
             </a:ln>
             <a:extLst>
               <a:ext uri="{91240B29-F687-4f45-9708-019B960494DF}">
-                <a14:hiddenLine xmlns="" xmlns:a14="http://schemas.microsoft.com/office/drawing/2010/main" w="9525">
+                <a14:hiddenLine xmlns:a14="http://schemas.microsoft.com/office/drawing/2010/main" xmlns="" w="9525">
                   <a:solidFill>
                     <a:srgbClr val="000000"/>
                   </a:solidFill>
@@ -35008,6 +35626,13 @@
               </a:ext>
             </a:extLst>
           </p:spPr>
+          <p:txBody>
+            <a:bodyPr/>
+            <a:lstStyle/>
+            <a:p>
+              <a:endParaRPr lang="en-US"/>
+            </a:p>
+          </p:txBody>
         </p:sp>
         <p:sp>
           <p:nvSpPr>
@@ -35065,7 +35690,7 @@
             </a:ln>
             <a:extLst>
               <a:ext uri="{91240B29-F687-4f45-9708-019B960494DF}">
-                <a14:hiddenLine xmlns="" xmlns:a14="http://schemas.microsoft.com/office/drawing/2010/main" w="9525">
+                <a14:hiddenLine xmlns:a14="http://schemas.microsoft.com/office/drawing/2010/main" xmlns="" w="9525">
                   <a:solidFill>
                     <a:srgbClr val="000000"/>
                   </a:solidFill>
@@ -35076,6 +35701,13 @@
               </a:ext>
             </a:extLst>
           </p:spPr>
+          <p:txBody>
+            <a:bodyPr/>
+            <a:lstStyle/>
+            <a:p>
+              <a:endParaRPr lang="en-US"/>
+            </a:p>
+          </p:txBody>
         </p:sp>
         <p:sp>
           <p:nvSpPr>
@@ -35155,7 +35787,7 @@
             </a:ln>
             <a:extLst>
               <a:ext uri="{91240B29-F687-4f45-9708-019B960494DF}">
-                <a14:hiddenLine xmlns="" xmlns:a14="http://schemas.microsoft.com/office/drawing/2010/main" w="9525">
+                <a14:hiddenLine xmlns:a14="http://schemas.microsoft.com/office/drawing/2010/main" xmlns="" w="9525">
                   <a:solidFill>
                     <a:srgbClr val="000000"/>
                   </a:solidFill>
@@ -35166,6 +35798,13 @@
               </a:ext>
             </a:extLst>
           </p:spPr>
+          <p:txBody>
+            <a:bodyPr/>
+            <a:lstStyle/>
+            <a:p>
+              <a:endParaRPr lang="en-US"/>
+            </a:p>
+          </p:txBody>
         </p:sp>
       </p:grpSp>
       <p:sp>
@@ -35295,7 +35934,7 @@
           <a:p>
             <a:fld id="{5BCAD085-E8A6-8845-BD4E-CB4CCA059FC4}" type="datetimeFigureOut">
               <a:rPr lang="en-US" smtClean="0"/>
-              <a:t>2/20/2026</a:t>
+              <a:t>2/22/2026</a:t>
             </a:fld>
             <a:endParaRPr lang="en-US"/>
           </a:p>
@@ -35562,7 +36201,7 @@
           <a:p>
             <a:fld id="{5BCAD085-E8A6-8845-BD4E-CB4CCA059FC4}" type="datetimeFigureOut">
               <a:rPr lang="en-US" smtClean="0"/>
-              <a:t>2/20/2026</a:t>
+              <a:t>2/22/2026</a:t>
             </a:fld>
             <a:endParaRPr lang="en-US"/>
           </a:p>
@@ -35758,7 +36397,7 @@
           <a:p>
             <a:fld id="{5BCAD085-E8A6-8845-BD4E-CB4CCA059FC4}" type="datetimeFigureOut">
               <a:rPr lang="en-US" smtClean="0"/>
-              <a:t>2/20/2026</a:t>
+              <a:t>2/22/2026</a:t>
             </a:fld>
             <a:endParaRPr lang="en-US"/>
           </a:p>
@@ -36021,7 +36660,7 @@
           <a:p>
             <a:fld id="{5BCAD085-E8A6-8845-BD4E-CB4CCA059FC4}" type="datetimeFigureOut">
               <a:rPr lang="en-US" smtClean="0"/>
-              <a:t>2/20/2026</a:t>
+              <a:t>2/22/2026</a:t>
             </a:fld>
             <a:endParaRPr lang="en-US"/>
           </a:p>
@@ -36455,7 +37094,7 @@
           <a:p>
             <a:fld id="{5BCAD085-E8A6-8845-BD4E-CB4CCA059FC4}" type="datetimeFigureOut">
               <a:rPr lang="en-US" smtClean="0"/>
-              <a:t>2/20/2026</a:t>
+              <a:t>2/22/2026</a:t>
             </a:fld>
             <a:endParaRPr lang="en-US"/>
           </a:p>
@@ -37001,7 +37640,7 @@
           <a:p>
             <a:fld id="{5BCAD085-E8A6-8845-BD4E-CB4CCA059FC4}" type="datetimeFigureOut">
               <a:rPr lang="en-US" smtClean="0"/>
-              <a:t>2/20/2026</a:t>
+              <a:t>2/22/2026</a:t>
             </a:fld>
             <a:endParaRPr lang="en-US"/>
           </a:p>
@@ -37721,7 +38360,7 @@
           <a:p>
             <a:fld id="{5BCAD085-E8A6-8845-BD4E-CB4CCA059FC4}" type="datetimeFigureOut">
               <a:rPr lang="en-US" smtClean="0"/>
-              <a:t>2/20/2026</a:t>
+              <a:t>2/22/2026</a:t>
             </a:fld>
             <a:endParaRPr lang="en-US"/>
           </a:p>
@@ -37895,7 +38534,7 @@
           <a:p>
             <a:fld id="{5BCAD085-E8A6-8845-BD4E-CB4CCA059FC4}" type="datetimeFigureOut">
               <a:rPr lang="en-US" smtClean="0"/>
-              <a:t>2/20/2026</a:t>
+              <a:t>2/22/2026</a:t>
             </a:fld>
             <a:endParaRPr lang="en-US"/>
           </a:p>
@@ -38075,7 +38714,7 @@
           <a:p>
             <a:fld id="{5BCAD085-E8A6-8845-BD4E-CB4CCA059FC4}" type="datetimeFigureOut">
               <a:rPr lang="en-US" smtClean="0"/>
-              <a:t>2/20/2026</a:t>
+              <a:t>2/22/2026</a:t>
             </a:fld>
             <a:endParaRPr lang="en-US"/>
           </a:p>
@@ -38260,7 +38899,7 @@
           <a:p>
             <a:fld id="{5BCAD085-E8A6-8845-BD4E-CB4CCA059FC4}" type="datetimeFigureOut">
               <a:rPr lang="en-US" smtClean="0"/>
-              <a:t>2/20/2026</a:t>
+              <a:t>2/22/2026</a:t>
             </a:fld>
             <a:endParaRPr lang="en-US"/>
           </a:p>
@@ -38520,7 +39159,7 @@
           <a:p>
             <a:fld id="{5BCAD085-E8A6-8845-BD4E-CB4CCA059FC4}" type="datetimeFigureOut">
               <a:rPr lang="en-US" smtClean="0"/>
-              <a:t>2/20/2026</a:t>
+              <a:t>2/22/2026</a:t>
             </a:fld>
             <a:endParaRPr lang="en-US"/>
           </a:p>
@@ -38752,7 +39391,7 @@
           <a:p>
             <a:fld id="{5BCAD085-E8A6-8845-BD4E-CB4CCA059FC4}" type="datetimeFigureOut">
               <a:rPr lang="en-US" smtClean="0"/>
-              <a:t>2/20/2026</a:t>
+              <a:t>2/22/2026</a:t>
             </a:fld>
             <a:endParaRPr lang="en-US"/>
           </a:p>
@@ -39133,7 +39772,7 @@
           <a:p>
             <a:fld id="{5BCAD085-E8A6-8845-BD4E-CB4CCA059FC4}" type="datetimeFigureOut">
               <a:rPr lang="en-US" smtClean="0"/>
-              <a:t>2/20/2026</a:t>
+              <a:t>2/22/2026</a:t>
             </a:fld>
             <a:endParaRPr lang="en-US"/>
           </a:p>
@@ -39251,7 +39890,7 @@
           <a:p>
             <a:fld id="{5BCAD085-E8A6-8845-BD4E-CB4CCA059FC4}" type="datetimeFigureOut">
               <a:rPr lang="en-US" smtClean="0"/>
-              <a:t>2/20/2026</a:t>
+              <a:t>2/22/2026</a:t>
             </a:fld>
             <a:endParaRPr lang="en-US"/>
           </a:p>
@@ -39346,7 +39985,7 @@
           <a:p>
             <a:fld id="{5BCAD085-E8A6-8845-BD4E-CB4CCA059FC4}" type="datetimeFigureOut">
               <a:rPr lang="en-US" smtClean="0"/>
-              <a:t>2/20/2026</a:t>
+              <a:t>2/22/2026</a:t>
             </a:fld>
             <a:endParaRPr lang="en-US"/>
           </a:p>
@@ -39595,7 +40234,7 @@
           <a:p>
             <a:fld id="{5BCAD085-E8A6-8845-BD4E-CB4CCA059FC4}" type="datetimeFigureOut">
               <a:rPr lang="en-US" smtClean="0"/>
-              <a:t>2/20/2026</a:t>
+              <a:t>2/22/2026</a:t>
             </a:fld>
             <a:endParaRPr lang="en-US"/>
           </a:p>
@@ -39847,7 +40486,7 @@
           <a:p>
             <a:fld id="{5BCAD085-E8A6-8845-BD4E-CB4CCA059FC4}" type="datetimeFigureOut">
               <a:rPr lang="en-US" smtClean="0"/>
-              <a:t>2/20/2026</a:t>
+              <a:t>2/22/2026</a:t>
             </a:fld>
             <a:endParaRPr lang="en-US"/>
           </a:p>
@@ -39970,7 +40609,7 @@
           <a:noFill/>
           <a:extLst>
             <a:ext uri="{909E8E84-426E-40dd-AFC4-6F175D3DCCD1}">
-              <a14:hiddenFill xmlns="" xmlns:a14="http://schemas.microsoft.com/office/drawing/2010/main">
+              <a14:hiddenFill xmlns:a14="http://schemas.microsoft.com/office/drawing/2010/main" xmlns="">
                 <a:solidFill>
                   <a:srgbClr val="FFFFFF"/>
                 </a:solidFill>
@@ -40044,7 +40683,7 @@
               </a:ln>
               <a:extLst>
                 <a:ext uri="{91240B29-F687-4f45-9708-019B960494DF}">
-                  <a14:hiddenLine xmlns="" xmlns:a14="http://schemas.microsoft.com/office/drawing/2010/main" w="9525">
+                  <a14:hiddenLine xmlns:a14="http://schemas.microsoft.com/office/drawing/2010/main" xmlns="" w="9525">
                     <a:solidFill>
                       <a:srgbClr val="000000"/>
                     </a:solidFill>
@@ -40055,6 +40694,13 @@
                 </a:ext>
               </a:extLst>
             </p:spPr>
+            <p:txBody>
+              <a:bodyPr/>
+              <a:lstStyle/>
+              <a:p>
+                <a:endParaRPr lang="en-US"/>
+              </a:p>
+            </p:txBody>
           </p:sp>
           <p:sp>
             <p:nvSpPr>
@@ -40134,7 +40780,7 @@
               </a:ln>
               <a:extLst>
                 <a:ext uri="{91240B29-F687-4f45-9708-019B960494DF}">
-                  <a14:hiddenLine xmlns="" xmlns:a14="http://schemas.microsoft.com/office/drawing/2010/main" w="9525">
+                  <a14:hiddenLine xmlns:a14="http://schemas.microsoft.com/office/drawing/2010/main" xmlns="" w="9525">
                     <a:solidFill>
                       <a:srgbClr val="000000"/>
                     </a:solidFill>
@@ -40145,6 +40791,13 @@
                 </a:ext>
               </a:extLst>
             </p:spPr>
+            <p:txBody>
+              <a:bodyPr/>
+              <a:lstStyle/>
+              <a:p>
+                <a:endParaRPr lang="en-US"/>
+              </a:p>
+            </p:txBody>
           </p:sp>
           <p:sp>
             <p:nvSpPr>
@@ -40224,7 +40877,7 @@
               </a:ln>
               <a:extLst>
                 <a:ext uri="{91240B29-F687-4f45-9708-019B960494DF}">
-                  <a14:hiddenLine xmlns="" xmlns:a14="http://schemas.microsoft.com/office/drawing/2010/main" w="9525">
+                  <a14:hiddenLine xmlns:a14="http://schemas.microsoft.com/office/drawing/2010/main" xmlns="" w="9525">
                     <a:solidFill>
                       <a:srgbClr val="000000"/>
                     </a:solidFill>
@@ -40235,6 +40888,13 @@
                 </a:ext>
               </a:extLst>
             </p:spPr>
+            <p:txBody>
+              <a:bodyPr/>
+              <a:lstStyle/>
+              <a:p>
+                <a:endParaRPr lang="en-US"/>
+              </a:p>
+            </p:txBody>
           </p:sp>
           <p:sp>
             <p:nvSpPr>
@@ -40286,7 +40946,7 @@
               </a:ln>
               <a:extLst>
                 <a:ext uri="{91240B29-F687-4f45-9708-019B960494DF}">
-                  <a14:hiddenLine xmlns="" xmlns:a14="http://schemas.microsoft.com/office/drawing/2010/main" w="9525">
+                  <a14:hiddenLine xmlns:a14="http://schemas.microsoft.com/office/drawing/2010/main" xmlns="" w="9525">
                     <a:solidFill>
                       <a:srgbClr val="000000"/>
                     </a:solidFill>
@@ -40297,6 +40957,13 @@
                 </a:ext>
               </a:extLst>
             </p:spPr>
+            <p:txBody>
+              <a:bodyPr/>
+              <a:lstStyle/>
+              <a:p>
+                <a:endParaRPr lang="en-US"/>
+              </a:p>
+            </p:txBody>
           </p:sp>
           <p:sp>
             <p:nvSpPr>
@@ -40376,7 +41043,7 @@
               </a:ln>
               <a:extLst>
                 <a:ext uri="{91240B29-F687-4f45-9708-019B960494DF}">
-                  <a14:hiddenLine xmlns="" xmlns:a14="http://schemas.microsoft.com/office/drawing/2010/main" w="9525">
+                  <a14:hiddenLine xmlns:a14="http://schemas.microsoft.com/office/drawing/2010/main" xmlns="" w="9525">
                     <a:solidFill>
                       <a:srgbClr val="000000"/>
                     </a:solidFill>
@@ -40387,6 +41054,13 @@
                 </a:ext>
               </a:extLst>
             </p:spPr>
+            <p:txBody>
+              <a:bodyPr/>
+              <a:lstStyle/>
+              <a:p>
+                <a:endParaRPr lang="en-US"/>
+              </a:p>
+            </p:txBody>
           </p:sp>
           <p:sp>
             <p:nvSpPr>
@@ -40438,7 +41112,7 @@
               </a:ln>
               <a:extLst>
                 <a:ext uri="{91240B29-F687-4f45-9708-019B960494DF}">
-                  <a14:hiddenLine xmlns="" xmlns:a14="http://schemas.microsoft.com/office/drawing/2010/main" w="9525">
+                  <a14:hiddenLine xmlns:a14="http://schemas.microsoft.com/office/drawing/2010/main" xmlns="" w="9525">
                     <a:solidFill>
                       <a:srgbClr val="000000"/>
                     </a:solidFill>
@@ -40449,6 +41123,13 @@
                 </a:ext>
               </a:extLst>
             </p:spPr>
+            <p:txBody>
+              <a:bodyPr/>
+              <a:lstStyle/>
+              <a:p>
+                <a:endParaRPr lang="en-US"/>
+              </a:p>
+            </p:txBody>
           </p:sp>
           <p:sp>
             <p:nvSpPr>
@@ -40500,7 +41181,7 @@
               </a:ln>
               <a:extLst>
                 <a:ext uri="{91240B29-F687-4f45-9708-019B960494DF}">
-                  <a14:hiddenLine xmlns="" xmlns:a14="http://schemas.microsoft.com/office/drawing/2010/main" w="9525">
+                  <a14:hiddenLine xmlns:a14="http://schemas.microsoft.com/office/drawing/2010/main" xmlns="" w="9525">
                     <a:solidFill>
                       <a:srgbClr val="000000"/>
                     </a:solidFill>
@@ -40511,6 +41192,13 @@
                 </a:ext>
               </a:extLst>
             </p:spPr>
+            <p:txBody>
+              <a:bodyPr/>
+              <a:lstStyle/>
+              <a:p>
+                <a:endParaRPr lang="en-US"/>
+              </a:p>
+            </p:txBody>
           </p:sp>
           <p:sp>
             <p:nvSpPr>
@@ -40590,7 +41278,7 @@
               </a:ln>
               <a:extLst>
                 <a:ext uri="{91240B29-F687-4f45-9708-019B960494DF}">
-                  <a14:hiddenLine xmlns="" xmlns:a14="http://schemas.microsoft.com/office/drawing/2010/main" w="9525">
+                  <a14:hiddenLine xmlns:a14="http://schemas.microsoft.com/office/drawing/2010/main" xmlns="" w="9525">
                     <a:solidFill>
                       <a:srgbClr val="000000"/>
                     </a:solidFill>
@@ -40601,6 +41289,13 @@
                 </a:ext>
               </a:extLst>
             </p:spPr>
+            <p:txBody>
+              <a:bodyPr/>
+              <a:lstStyle/>
+              <a:p>
+                <a:endParaRPr lang="en-US"/>
+              </a:p>
+            </p:txBody>
           </p:sp>
           <p:sp>
             <p:nvSpPr>
@@ -40680,7 +41375,7 @@
               </a:ln>
               <a:extLst>
                 <a:ext uri="{91240B29-F687-4f45-9708-019B960494DF}">
-                  <a14:hiddenLine xmlns="" xmlns:a14="http://schemas.microsoft.com/office/drawing/2010/main" w="9525">
+                  <a14:hiddenLine xmlns:a14="http://schemas.microsoft.com/office/drawing/2010/main" xmlns="" w="9525">
                     <a:solidFill>
                       <a:srgbClr val="000000"/>
                     </a:solidFill>
@@ -40691,6 +41386,13 @@
                 </a:ext>
               </a:extLst>
             </p:spPr>
+            <p:txBody>
+              <a:bodyPr/>
+              <a:lstStyle/>
+              <a:p>
+                <a:endParaRPr lang="en-US"/>
+              </a:p>
+            </p:txBody>
           </p:sp>
           <p:sp>
             <p:nvSpPr>
@@ -40742,7 +41444,7 @@
               </a:ln>
               <a:extLst>
                 <a:ext uri="{91240B29-F687-4f45-9708-019B960494DF}">
-                  <a14:hiddenLine xmlns="" xmlns:a14="http://schemas.microsoft.com/office/drawing/2010/main" w="9525">
+                  <a14:hiddenLine xmlns:a14="http://schemas.microsoft.com/office/drawing/2010/main" xmlns="" w="9525">
                     <a:solidFill>
                       <a:srgbClr val="000000"/>
                     </a:solidFill>
@@ -40753,6 +41455,13 @@
                 </a:ext>
               </a:extLst>
             </p:spPr>
+            <p:txBody>
+              <a:bodyPr/>
+              <a:lstStyle/>
+              <a:p>
+                <a:endParaRPr lang="en-US"/>
+              </a:p>
+            </p:txBody>
           </p:sp>
           <p:sp>
             <p:nvSpPr>
@@ -40852,7 +41561,7 @@
               </a:ln>
               <a:extLst>
                 <a:ext uri="{91240B29-F687-4f45-9708-019B960494DF}">
-                  <a14:hiddenLine xmlns="" xmlns:a14="http://schemas.microsoft.com/office/drawing/2010/main" w="9525">
+                  <a14:hiddenLine xmlns:a14="http://schemas.microsoft.com/office/drawing/2010/main" xmlns="" w="9525">
                     <a:solidFill>
                       <a:srgbClr val="000000"/>
                     </a:solidFill>
@@ -40863,6 +41572,13 @@
                 </a:ext>
               </a:extLst>
             </p:spPr>
+            <p:txBody>
+              <a:bodyPr/>
+              <a:lstStyle/>
+              <a:p>
+                <a:endParaRPr lang="en-US"/>
+              </a:p>
+            </p:txBody>
           </p:sp>
           <p:sp>
             <p:nvSpPr>
@@ -40891,6 +41607,13 @@
                 <a:tailEnd/>
               </a:ln>
             </p:spPr>
+            <p:txBody>
+              <a:bodyPr/>
+              <a:lstStyle/>
+              <a:p>
+                <a:endParaRPr lang="en-US"/>
+              </a:p>
+            </p:txBody>
           </p:sp>
           <p:sp>
             <p:nvSpPr>
@@ -40936,7 +41659,7 @@
               </a:ln>
               <a:extLst>
                 <a:ext uri="{91240B29-F687-4f45-9708-019B960494DF}">
-                  <a14:hiddenLine xmlns="" xmlns:a14="http://schemas.microsoft.com/office/drawing/2010/main" w="9525">
+                  <a14:hiddenLine xmlns:a14="http://schemas.microsoft.com/office/drawing/2010/main" xmlns="" w="9525">
                     <a:solidFill>
                       <a:srgbClr val="000000"/>
                     </a:solidFill>
@@ -40947,6 +41670,13 @@
                 </a:ext>
               </a:extLst>
             </p:spPr>
+            <p:txBody>
+              <a:bodyPr/>
+              <a:lstStyle/>
+              <a:p>
+                <a:endParaRPr lang="en-US"/>
+              </a:p>
+            </p:txBody>
           </p:sp>
           <p:sp>
             <p:nvSpPr>
@@ -40998,7 +41728,7 @@
               </a:ln>
               <a:extLst>
                 <a:ext uri="{91240B29-F687-4f45-9708-019B960494DF}">
-                  <a14:hiddenLine xmlns="" xmlns:a14="http://schemas.microsoft.com/office/drawing/2010/main" w="9525">
+                  <a14:hiddenLine xmlns:a14="http://schemas.microsoft.com/office/drawing/2010/main" xmlns="" w="9525">
                     <a:solidFill>
                       <a:srgbClr val="000000"/>
                     </a:solidFill>
@@ -41009,6 +41739,13 @@
                 </a:ext>
               </a:extLst>
             </p:spPr>
+            <p:txBody>
+              <a:bodyPr/>
+              <a:lstStyle/>
+              <a:p>
+                <a:endParaRPr lang="en-US"/>
+              </a:p>
+            </p:txBody>
           </p:sp>
           <p:sp>
             <p:nvSpPr>
@@ -41060,7 +41797,7 @@
               </a:ln>
               <a:extLst>
                 <a:ext uri="{91240B29-F687-4f45-9708-019B960494DF}">
-                  <a14:hiddenLine xmlns="" xmlns:a14="http://schemas.microsoft.com/office/drawing/2010/main" w="9525">
+                  <a14:hiddenLine xmlns:a14="http://schemas.microsoft.com/office/drawing/2010/main" xmlns="" w="9525">
                     <a:solidFill>
                       <a:srgbClr val="000000"/>
                     </a:solidFill>
@@ -41071,6 +41808,13 @@
                 </a:ext>
               </a:extLst>
             </p:spPr>
+            <p:txBody>
+              <a:bodyPr/>
+              <a:lstStyle/>
+              <a:p>
+                <a:endParaRPr lang="en-US"/>
+              </a:p>
+            </p:txBody>
           </p:sp>
           <p:sp>
             <p:nvSpPr>
@@ -41150,7 +41894,7 @@
               </a:ln>
               <a:extLst>
                 <a:ext uri="{91240B29-F687-4f45-9708-019B960494DF}">
-                  <a14:hiddenLine xmlns="" xmlns:a14="http://schemas.microsoft.com/office/drawing/2010/main" w="9525">
+                  <a14:hiddenLine xmlns:a14="http://schemas.microsoft.com/office/drawing/2010/main" xmlns="" w="9525">
                     <a:solidFill>
                       <a:srgbClr val="000000"/>
                     </a:solidFill>
@@ -41161,6 +41905,13 @@
                 </a:ext>
               </a:extLst>
             </p:spPr>
+            <p:txBody>
+              <a:bodyPr/>
+              <a:lstStyle/>
+              <a:p>
+                <a:endParaRPr lang="en-US"/>
+              </a:p>
+            </p:txBody>
           </p:sp>
           <p:sp>
             <p:nvSpPr>
@@ -41184,7 +41935,7 @@
               </a:ln>
               <a:extLst>
                 <a:ext uri="{91240B29-F687-4f45-9708-019B960494DF}">
-                  <a14:hiddenLine xmlns="" xmlns:a14="http://schemas.microsoft.com/office/drawing/2010/main" w="9525">
+                  <a14:hiddenLine xmlns:a14="http://schemas.microsoft.com/office/drawing/2010/main" xmlns="" w="9525">
                     <a:solidFill>
                       <a:srgbClr val="000000"/>
                     </a:solidFill>
@@ -41195,6 +41946,13 @@
                 </a:ext>
               </a:extLst>
             </p:spPr>
+            <p:txBody>
+              <a:bodyPr/>
+              <a:lstStyle/>
+              <a:p>
+                <a:endParaRPr lang="en-US"/>
+              </a:p>
+            </p:txBody>
           </p:sp>
           <p:sp>
             <p:nvSpPr>
@@ -41249,7 +42007,7 @@
               </a:ln>
               <a:extLst>
                 <a:ext uri="{91240B29-F687-4f45-9708-019B960494DF}">
-                  <a14:hiddenLine xmlns="" xmlns:a14="http://schemas.microsoft.com/office/drawing/2010/main" w="9525">
+                  <a14:hiddenLine xmlns:a14="http://schemas.microsoft.com/office/drawing/2010/main" xmlns="" w="9525">
                     <a:solidFill>
                       <a:srgbClr val="000000"/>
                     </a:solidFill>
@@ -41260,6 +42018,13 @@
                 </a:ext>
               </a:extLst>
             </p:spPr>
+            <p:txBody>
+              <a:bodyPr/>
+              <a:lstStyle/>
+              <a:p>
+                <a:endParaRPr lang="en-US"/>
+              </a:p>
+            </p:txBody>
           </p:sp>
           <p:sp>
             <p:nvSpPr>
@@ -41339,7 +42104,7 @@
               </a:ln>
               <a:extLst>
                 <a:ext uri="{91240B29-F687-4f45-9708-019B960494DF}">
-                  <a14:hiddenLine xmlns="" xmlns:a14="http://schemas.microsoft.com/office/drawing/2010/main" w="9525">
+                  <a14:hiddenLine xmlns:a14="http://schemas.microsoft.com/office/drawing/2010/main" xmlns="" w="9525">
                     <a:solidFill>
                       <a:srgbClr val="000000"/>
                     </a:solidFill>
@@ -41350,6 +42115,13 @@
                 </a:ext>
               </a:extLst>
             </p:spPr>
+            <p:txBody>
+              <a:bodyPr/>
+              <a:lstStyle/>
+              <a:p>
+                <a:endParaRPr lang="en-US"/>
+              </a:p>
+            </p:txBody>
           </p:sp>
           <p:sp>
             <p:nvSpPr>
@@ -41401,7 +42173,7 @@
               </a:ln>
               <a:extLst>
                 <a:ext uri="{91240B29-F687-4f45-9708-019B960494DF}">
-                  <a14:hiddenLine xmlns="" xmlns:a14="http://schemas.microsoft.com/office/drawing/2010/main" w="9525">
+                  <a14:hiddenLine xmlns:a14="http://schemas.microsoft.com/office/drawing/2010/main" xmlns="" w="9525">
                     <a:solidFill>
                       <a:srgbClr val="000000"/>
                     </a:solidFill>
@@ -41412,6 +42184,13 @@
                 </a:ext>
               </a:extLst>
             </p:spPr>
+            <p:txBody>
+              <a:bodyPr/>
+              <a:lstStyle/>
+              <a:p>
+                <a:endParaRPr lang="en-US"/>
+              </a:p>
+            </p:txBody>
           </p:sp>
           <p:sp>
             <p:nvSpPr>
@@ -41491,7 +42270,7 @@
               </a:ln>
               <a:extLst>
                 <a:ext uri="{91240B29-F687-4f45-9708-019B960494DF}">
-                  <a14:hiddenLine xmlns="" xmlns:a14="http://schemas.microsoft.com/office/drawing/2010/main" w="9525">
+                  <a14:hiddenLine xmlns:a14="http://schemas.microsoft.com/office/drawing/2010/main" xmlns="" w="9525">
                     <a:solidFill>
                       <a:srgbClr val="000000"/>
                     </a:solidFill>
@@ -41502,6 +42281,13 @@
                 </a:ext>
               </a:extLst>
             </p:spPr>
+            <p:txBody>
+              <a:bodyPr/>
+              <a:lstStyle/>
+              <a:p>
+                <a:endParaRPr lang="en-US"/>
+              </a:p>
+            </p:txBody>
           </p:sp>
           <p:sp>
             <p:nvSpPr>
@@ -41556,7 +42342,7 @@
               </a:ln>
               <a:extLst>
                 <a:ext uri="{91240B29-F687-4f45-9708-019B960494DF}">
-                  <a14:hiddenLine xmlns="" xmlns:a14="http://schemas.microsoft.com/office/drawing/2010/main" w="9525">
+                  <a14:hiddenLine xmlns:a14="http://schemas.microsoft.com/office/drawing/2010/main" xmlns="" w="9525">
                     <a:solidFill>
                       <a:srgbClr val="000000"/>
                     </a:solidFill>
@@ -41567,6 +42353,13 @@
                 </a:ext>
               </a:extLst>
             </p:spPr>
+            <p:txBody>
+              <a:bodyPr/>
+              <a:lstStyle/>
+              <a:p>
+                <a:endParaRPr lang="en-US"/>
+              </a:p>
+            </p:txBody>
           </p:sp>
           <p:sp>
             <p:nvSpPr>
@@ -41618,7 +42411,7 @@
               </a:ln>
               <a:extLst>
                 <a:ext uri="{91240B29-F687-4f45-9708-019B960494DF}">
-                  <a14:hiddenLine xmlns="" xmlns:a14="http://schemas.microsoft.com/office/drawing/2010/main" w="9525">
+                  <a14:hiddenLine xmlns:a14="http://schemas.microsoft.com/office/drawing/2010/main" xmlns="" w="9525">
                     <a:solidFill>
                       <a:srgbClr val="000000"/>
                     </a:solidFill>
@@ -41629,6 +42422,13 @@
                 </a:ext>
               </a:extLst>
             </p:spPr>
+            <p:txBody>
+              <a:bodyPr/>
+              <a:lstStyle/>
+              <a:p>
+                <a:endParaRPr lang="en-US"/>
+              </a:p>
+            </p:txBody>
           </p:sp>
           <p:sp>
             <p:nvSpPr>
@@ -41708,7 +42508,7 @@
               </a:ln>
               <a:extLst>
                 <a:ext uri="{91240B29-F687-4f45-9708-019B960494DF}">
-                  <a14:hiddenLine xmlns="" xmlns:a14="http://schemas.microsoft.com/office/drawing/2010/main" w="9525">
+                  <a14:hiddenLine xmlns:a14="http://schemas.microsoft.com/office/drawing/2010/main" xmlns="" w="9525">
                     <a:solidFill>
                       <a:srgbClr val="000000"/>
                     </a:solidFill>
@@ -41719,6 +42519,13 @@
                 </a:ext>
               </a:extLst>
             </p:spPr>
+            <p:txBody>
+              <a:bodyPr/>
+              <a:lstStyle/>
+              <a:p>
+                <a:endParaRPr lang="en-US"/>
+              </a:p>
+            </p:txBody>
           </p:sp>
           <p:sp>
             <p:nvSpPr>
@@ -41798,7 +42605,7 @@
               </a:ln>
               <a:extLst>
                 <a:ext uri="{91240B29-F687-4f45-9708-019B960494DF}">
-                  <a14:hiddenLine xmlns="" xmlns:a14="http://schemas.microsoft.com/office/drawing/2010/main" w="9525">
+                  <a14:hiddenLine xmlns:a14="http://schemas.microsoft.com/office/drawing/2010/main" xmlns="" w="9525">
                     <a:solidFill>
                       <a:srgbClr val="000000"/>
                     </a:solidFill>
@@ -41809,6 +42616,13 @@
                 </a:ext>
               </a:extLst>
             </p:spPr>
+            <p:txBody>
+              <a:bodyPr/>
+              <a:lstStyle/>
+              <a:p>
+                <a:endParaRPr lang="en-US"/>
+              </a:p>
+            </p:txBody>
           </p:sp>
           <p:sp>
             <p:nvSpPr>
@@ -41863,7 +42677,7 @@
               </a:ln>
               <a:extLst>
                 <a:ext uri="{91240B29-F687-4f45-9708-019B960494DF}">
-                  <a14:hiddenLine xmlns="" xmlns:a14="http://schemas.microsoft.com/office/drawing/2010/main" w="9525">
+                  <a14:hiddenLine xmlns:a14="http://schemas.microsoft.com/office/drawing/2010/main" xmlns="" w="9525">
                     <a:solidFill>
                       <a:srgbClr val="000000"/>
                     </a:solidFill>
@@ -41874,6 +42688,13 @@
                 </a:ext>
               </a:extLst>
             </p:spPr>
+            <p:txBody>
+              <a:bodyPr/>
+              <a:lstStyle/>
+              <a:p>
+                <a:endParaRPr lang="en-US"/>
+              </a:p>
+            </p:txBody>
           </p:sp>
           <p:sp>
             <p:nvSpPr>
@@ -41983,7 +42804,7 @@
               </a:ln>
               <a:extLst>
                 <a:ext uri="{91240B29-F687-4f45-9708-019B960494DF}">
-                  <a14:hiddenLine xmlns="" xmlns:a14="http://schemas.microsoft.com/office/drawing/2010/main" w="9525">
+                  <a14:hiddenLine xmlns:a14="http://schemas.microsoft.com/office/drawing/2010/main" xmlns="" w="9525">
                     <a:solidFill>
                       <a:srgbClr val="000000"/>
                     </a:solidFill>
@@ -41994,6 +42815,13 @@
                 </a:ext>
               </a:extLst>
             </p:spPr>
+            <p:txBody>
+              <a:bodyPr/>
+              <a:lstStyle/>
+              <a:p>
+                <a:endParaRPr lang="en-US"/>
+              </a:p>
+            </p:txBody>
           </p:sp>
         </p:grpSp>
         <p:grpSp>
@@ -42081,7 +42909,7 @@
               </a:ln>
               <a:extLst>
                 <a:ext uri="{91240B29-F687-4f45-9708-019B960494DF}">
-                  <a14:hiddenLine xmlns="" xmlns:a14="http://schemas.microsoft.com/office/drawing/2010/main" w="9525">
+                  <a14:hiddenLine xmlns:a14="http://schemas.microsoft.com/office/drawing/2010/main" xmlns="" w="9525">
                     <a:solidFill>
                       <a:srgbClr val="000000"/>
                     </a:solidFill>
@@ -42092,6 +42920,13 @@
                 </a:ext>
               </a:extLst>
             </p:spPr>
+            <p:txBody>
+              <a:bodyPr/>
+              <a:lstStyle/>
+              <a:p>
+                <a:endParaRPr lang="en-US"/>
+              </a:p>
+            </p:txBody>
           </p:sp>
           <p:sp>
             <p:nvSpPr>
@@ -42196,7 +43031,7 @@
               </a:ln>
               <a:extLst>
                 <a:ext uri="{91240B29-F687-4f45-9708-019B960494DF}">
-                  <a14:hiddenLine xmlns="" xmlns:a14="http://schemas.microsoft.com/office/drawing/2010/main" w="9525">
+                  <a14:hiddenLine xmlns:a14="http://schemas.microsoft.com/office/drawing/2010/main" xmlns="" w="9525">
                     <a:solidFill>
                       <a:srgbClr val="000000"/>
                     </a:solidFill>
@@ -42207,6 +43042,13 @@
                 </a:ext>
               </a:extLst>
             </p:spPr>
+            <p:txBody>
+              <a:bodyPr/>
+              <a:lstStyle/>
+              <a:p>
+                <a:endParaRPr lang="en-US"/>
+              </a:p>
+            </p:txBody>
           </p:sp>
           <p:sp>
             <p:nvSpPr>
@@ -42286,7 +43128,7 @@
               </a:ln>
               <a:extLst>
                 <a:ext uri="{91240B29-F687-4f45-9708-019B960494DF}">
-                  <a14:hiddenLine xmlns="" xmlns:a14="http://schemas.microsoft.com/office/drawing/2010/main" w="9525">
+                  <a14:hiddenLine xmlns:a14="http://schemas.microsoft.com/office/drawing/2010/main" xmlns="" w="9525">
                     <a:solidFill>
                       <a:srgbClr val="000000"/>
                     </a:solidFill>
@@ -42297,6 +43139,13 @@
                 </a:ext>
               </a:extLst>
             </p:spPr>
+            <p:txBody>
+              <a:bodyPr/>
+              <a:lstStyle/>
+              <a:p>
+                <a:endParaRPr lang="en-US"/>
+              </a:p>
+            </p:txBody>
           </p:sp>
           <p:sp>
             <p:nvSpPr>
@@ -42351,7 +43200,7 @@
               </a:ln>
               <a:extLst>
                 <a:ext uri="{91240B29-F687-4f45-9708-019B960494DF}">
-                  <a14:hiddenLine xmlns="" xmlns:a14="http://schemas.microsoft.com/office/drawing/2010/main" w="9525">
+                  <a14:hiddenLine xmlns:a14="http://schemas.microsoft.com/office/drawing/2010/main" xmlns="" w="9525">
                     <a:solidFill>
                       <a:srgbClr val="000000"/>
                     </a:solidFill>
@@ -42362,6 +43211,13 @@
                 </a:ext>
               </a:extLst>
             </p:spPr>
+            <p:txBody>
+              <a:bodyPr/>
+              <a:lstStyle/>
+              <a:p>
+                <a:endParaRPr lang="en-US"/>
+              </a:p>
+            </p:txBody>
           </p:sp>
           <p:sp>
             <p:nvSpPr>
@@ -42441,7 +43297,7 @@
               </a:ln>
               <a:extLst>
                 <a:ext uri="{91240B29-F687-4f45-9708-019B960494DF}">
-                  <a14:hiddenLine xmlns="" xmlns:a14="http://schemas.microsoft.com/office/drawing/2010/main" w="9525">
+                  <a14:hiddenLine xmlns:a14="http://schemas.microsoft.com/office/drawing/2010/main" xmlns="" w="9525">
                     <a:solidFill>
                       <a:srgbClr val="000000"/>
                     </a:solidFill>
@@ -42452,6 +43308,13 @@
                 </a:ext>
               </a:extLst>
             </p:spPr>
+            <p:txBody>
+              <a:bodyPr/>
+              <a:lstStyle/>
+              <a:p>
+                <a:endParaRPr lang="en-US"/>
+              </a:p>
+            </p:txBody>
           </p:sp>
           <p:sp>
             <p:nvSpPr>
@@ -42509,7 +43372,7 @@
               </a:ln>
               <a:extLst>
                 <a:ext uri="{91240B29-F687-4f45-9708-019B960494DF}">
-                  <a14:hiddenLine xmlns="" xmlns:a14="http://schemas.microsoft.com/office/drawing/2010/main" w="9525">
+                  <a14:hiddenLine xmlns:a14="http://schemas.microsoft.com/office/drawing/2010/main" xmlns="" w="9525">
                     <a:solidFill>
                       <a:srgbClr val="000000"/>
                     </a:solidFill>
@@ -42520,6 +43383,13 @@
                 </a:ext>
               </a:extLst>
             </p:spPr>
+            <p:txBody>
+              <a:bodyPr/>
+              <a:lstStyle/>
+              <a:p>
+                <a:endParaRPr lang="en-US"/>
+              </a:p>
+            </p:txBody>
           </p:sp>
           <p:sp>
             <p:nvSpPr>
@@ -42599,7 +43469,7 @@
               </a:ln>
               <a:extLst>
                 <a:ext uri="{91240B29-F687-4f45-9708-019B960494DF}">
-                  <a14:hiddenLine xmlns="" xmlns:a14="http://schemas.microsoft.com/office/drawing/2010/main" w="9525">
+                  <a14:hiddenLine xmlns:a14="http://schemas.microsoft.com/office/drawing/2010/main" xmlns="" w="9525">
                     <a:solidFill>
                       <a:srgbClr val="000000"/>
                     </a:solidFill>
@@ -42610,6 +43480,13 @@
                 </a:ext>
               </a:extLst>
             </p:spPr>
+            <p:txBody>
+              <a:bodyPr/>
+              <a:lstStyle/>
+              <a:p>
+                <a:endParaRPr lang="en-US"/>
+              </a:p>
+            </p:txBody>
           </p:sp>
           <p:sp>
             <p:nvSpPr>
@@ -42667,7 +43544,7 @@
               </a:ln>
               <a:extLst>
                 <a:ext uri="{91240B29-F687-4f45-9708-019B960494DF}">
-                  <a14:hiddenLine xmlns="" xmlns:a14="http://schemas.microsoft.com/office/drawing/2010/main" w="9525">
+                  <a14:hiddenLine xmlns:a14="http://schemas.microsoft.com/office/drawing/2010/main" xmlns="" w="9525">
                     <a:solidFill>
                       <a:srgbClr val="000000"/>
                     </a:solidFill>
@@ -42678,6 +43555,13 @@
                 </a:ext>
               </a:extLst>
             </p:spPr>
+            <p:txBody>
+              <a:bodyPr/>
+              <a:lstStyle/>
+              <a:p>
+                <a:endParaRPr lang="en-US"/>
+              </a:p>
+            </p:txBody>
           </p:sp>
           <p:sp>
             <p:nvSpPr>
@@ -42757,7 +43641,7 @@
               </a:ln>
               <a:extLst>
                 <a:ext uri="{91240B29-F687-4f45-9708-019B960494DF}">
-                  <a14:hiddenLine xmlns="" xmlns:a14="http://schemas.microsoft.com/office/drawing/2010/main" w="9525">
+                  <a14:hiddenLine xmlns:a14="http://schemas.microsoft.com/office/drawing/2010/main" xmlns="" w="9525">
                     <a:solidFill>
                       <a:srgbClr val="000000"/>
                     </a:solidFill>
@@ -42768,6 +43652,13 @@
                 </a:ext>
               </a:extLst>
             </p:spPr>
+            <p:txBody>
+              <a:bodyPr/>
+              <a:lstStyle/>
+              <a:p>
+                <a:endParaRPr lang="en-US"/>
+              </a:p>
+            </p:txBody>
           </p:sp>
           <p:sp>
             <p:nvSpPr>
@@ -42791,7 +43682,7 @@
               </a:ln>
               <a:extLst>
                 <a:ext uri="{91240B29-F687-4f45-9708-019B960494DF}">
-                  <a14:hiddenLine xmlns="" xmlns:a14="http://schemas.microsoft.com/office/drawing/2010/main" w="9525">
+                  <a14:hiddenLine xmlns:a14="http://schemas.microsoft.com/office/drawing/2010/main" xmlns="" w="9525">
                     <a:solidFill>
                       <a:srgbClr val="000000"/>
                     </a:solidFill>
@@ -42802,6 +43693,13 @@
                 </a:ext>
               </a:extLst>
             </p:spPr>
+            <p:txBody>
+              <a:bodyPr/>
+              <a:lstStyle/>
+              <a:p>
+                <a:endParaRPr lang="en-US"/>
+              </a:p>
+            </p:txBody>
           </p:sp>
         </p:grpSp>
       </p:grpSp>
@@ -42931,7 +43829,7 @@
           <a:p>
             <a:fld id="{5BCAD085-E8A6-8845-BD4E-CB4CCA059FC4}" type="datetimeFigureOut">
               <a:rPr lang="en-US" smtClean="0"/>
-              <a:t>2/20/2026</a:t>
+              <a:t>2/22/2026</a:t>
             </a:fld>
             <a:endParaRPr lang="en-US"/>
           </a:p>
@@ -43725,7 +44623,7 @@
         </p:xfrm>
         <a:graphic>
           <a:graphicData uri="http://schemas.openxmlformats.org/drawingml/2006/diagram">
-            <dgm:relIds xmlns:dgm="http://schemas.openxmlformats.org/drawingml/2006/diagram" xmlns:r="http://schemas.openxmlformats.org/officeDocument/2006/relationships" r:dm="rId2" r:lo="rId3" r:qs="rId4" r:cs="rId5"/>
+            <dgm:relIds xmlns:dgm="http://schemas.openxmlformats.org/drawingml/2006/diagram" xmlns:r="http://schemas.openxmlformats.org/officeDocument/2006/relationships" r:dm="rId3" r:lo="rId4" r:qs="rId5" r:cs="rId6"/>
           </a:graphicData>
         </a:graphic>
       </p:graphicFrame>
@@ -43828,7 +44726,7 @@
         </p:xfrm>
         <a:graphic>
           <a:graphicData uri="http://schemas.openxmlformats.org/drawingml/2006/diagram">
-            <dgm:relIds xmlns:dgm="http://schemas.openxmlformats.org/drawingml/2006/diagram" xmlns:r="http://schemas.openxmlformats.org/officeDocument/2006/relationships" r:dm="rId2" r:lo="rId3" r:qs="rId4" r:cs="rId5"/>
+            <dgm:relIds xmlns:dgm="http://schemas.openxmlformats.org/drawingml/2006/diagram" xmlns:r="http://schemas.openxmlformats.org/officeDocument/2006/relationships" r:dm="rId3" r:lo="rId4" r:qs="rId5" r:cs="rId6"/>
           </a:graphicData>
         </a:graphic>
       </p:graphicFrame>
@@ -44473,7 +45371,7 @@
         </p:xfrm>
         <a:graphic>
           <a:graphicData uri="http://schemas.openxmlformats.org/drawingml/2006/diagram">
-            <dgm:relIds xmlns:dgm="http://schemas.openxmlformats.org/drawingml/2006/diagram" xmlns:r="http://schemas.openxmlformats.org/officeDocument/2006/relationships" r:dm="rId2" r:lo="rId3" r:qs="rId4" r:cs="rId5"/>
+            <dgm:relIds xmlns:dgm="http://schemas.openxmlformats.org/drawingml/2006/diagram" xmlns:r="http://schemas.openxmlformats.org/officeDocument/2006/relationships" r:dm="rId3" r:lo="rId4" r:qs="rId5" r:cs="rId6"/>
           </a:graphicData>
         </a:graphic>
       </p:graphicFrame>
